--- a/ISIC_Presentation.pptx
+++ b/ISIC_Presentation.pptx
@@ -5,7 +5,7 @@
     <p:sldMasterId id="2147483648" r:id="rId1"/>
   </p:sldMasterIdLst>
   <p:notesMasterIdLst>
-    <p:notesMasterId r:id="rId11"/>
+    <p:notesMasterId r:id="rId13"/>
   </p:notesMasterIdLst>
   <p:sldIdLst>
     <p:sldId id="256" r:id="rId2"/>
@@ -16,7 +16,9 @@
     <p:sldId id="264" r:id="rId7"/>
     <p:sldId id="259" r:id="rId8"/>
     <p:sldId id="260" r:id="rId9"/>
-    <p:sldId id="257" r:id="rId10"/>
+    <p:sldId id="265" r:id="rId10"/>
+    <p:sldId id="266" r:id="rId11"/>
+    <p:sldId id="257" r:id="rId12"/>
   </p:sldIdLst>
   <p:sldSz cx="12192000" cy="6858000"/>
   <p:notesSz cx="6858000" cy="9144000"/>
@@ -205,7 +207,7 @@
           <a:p>
             <a:fld id="{A2ECF002-9369-4E0E-806D-8B7DD21EF979}" type="datetimeFigureOut">
               <a:rPr lang="en-US" smtClean="0"/>
-              <a:t>31/12/2025</a:t>
+              <a:t>2/1/2026</a:t>
             </a:fld>
             <a:endParaRPr lang="en-US"/>
           </a:p>
@@ -703,7 +705,7 @@
           <a:p>
             <a:fld id="{7DDFA97A-BFF9-4472-9471-4DBD18C6FCF5}" type="datetimeFigureOut">
               <a:rPr lang="en-US" smtClean="0"/>
-              <a:t>31/12/2025</a:t>
+              <a:t>2/1/2026</a:t>
             </a:fld>
             <a:endParaRPr lang="en-US"/>
           </a:p>
@@ -901,7 +903,7 @@
           <a:p>
             <a:fld id="{7DDFA97A-BFF9-4472-9471-4DBD18C6FCF5}" type="datetimeFigureOut">
               <a:rPr lang="en-US" smtClean="0"/>
-              <a:t>31/12/2025</a:t>
+              <a:t>2/1/2026</a:t>
             </a:fld>
             <a:endParaRPr lang="en-US"/>
           </a:p>
@@ -1109,7 +1111,7 @@
           <a:p>
             <a:fld id="{7DDFA97A-BFF9-4472-9471-4DBD18C6FCF5}" type="datetimeFigureOut">
               <a:rPr lang="en-US" smtClean="0"/>
-              <a:t>31/12/2025</a:t>
+              <a:t>2/1/2026</a:t>
             </a:fld>
             <a:endParaRPr lang="en-US"/>
           </a:p>
@@ -1307,7 +1309,7 @@
           <a:p>
             <a:fld id="{7DDFA97A-BFF9-4472-9471-4DBD18C6FCF5}" type="datetimeFigureOut">
               <a:rPr lang="en-US" smtClean="0"/>
-              <a:t>31/12/2025</a:t>
+              <a:t>2/1/2026</a:t>
             </a:fld>
             <a:endParaRPr lang="en-US"/>
           </a:p>
@@ -1582,7 +1584,7 @@
           <a:p>
             <a:fld id="{7DDFA97A-BFF9-4472-9471-4DBD18C6FCF5}" type="datetimeFigureOut">
               <a:rPr lang="en-US" smtClean="0"/>
-              <a:t>31/12/2025</a:t>
+              <a:t>2/1/2026</a:t>
             </a:fld>
             <a:endParaRPr lang="en-US"/>
           </a:p>
@@ -1847,7 +1849,7 @@
           <a:p>
             <a:fld id="{7DDFA97A-BFF9-4472-9471-4DBD18C6FCF5}" type="datetimeFigureOut">
               <a:rPr lang="en-US" smtClean="0"/>
-              <a:t>31/12/2025</a:t>
+              <a:t>2/1/2026</a:t>
             </a:fld>
             <a:endParaRPr lang="en-US"/>
           </a:p>
@@ -2259,7 +2261,7 @@
           <a:p>
             <a:fld id="{7DDFA97A-BFF9-4472-9471-4DBD18C6FCF5}" type="datetimeFigureOut">
               <a:rPr lang="en-US" smtClean="0"/>
-              <a:t>31/12/2025</a:t>
+              <a:t>2/1/2026</a:t>
             </a:fld>
             <a:endParaRPr lang="en-US"/>
           </a:p>
@@ -2400,7 +2402,7 @@
           <a:p>
             <a:fld id="{7DDFA97A-BFF9-4472-9471-4DBD18C6FCF5}" type="datetimeFigureOut">
               <a:rPr lang="en-US" smtClean="0"/>
-              <a:t>31/12/2025</a:t>
+              <a:t>2/1/2026</a:t>
             </a:fld>
             <a:endParaRPr lang="en-US"/>
           </a:p>
@@ -2513,7 +2515,7 @@
           <a:p>
             <a:fld id="{7DDFA97A-BFF9-4472-9471-4DBD18C6FCF5}" type="datetimeFigureOut">
               <a:rPr lang="en-US" smtClean="0"/>
-              <a:t>31/12/2025</a:t>
+              <a:t>2/1/2026</a:t>
             </a:fld>
             <a:endParaRPr lang="en-US"/>
           </a:p>
@@ -2824,7 +2826,7 @@
           <a:p>
             <a:fld id="{7DDFA97A-BFF9-4472-9471-4DBD18C6FCF5}" type="datetimeFigureOut">
               <a:rPr lang="en-US" smtClean="0"/>
-              <a:t>31/12/2025</a:t>
+              <a:t>2/1/2026</a:t>
             </a:fld>
             <a:endParaRPr lang="en-US"/>
           </a:p>
@@ -3112,7 +3114,7 @@
           <a:p>
             <a:fld id="{7DDFA97A-BFF9-4472-9471-4DBD18C6FCF5}" type="datetimeFigureOut">
               <a:rPr lang="en-US" smtClean="0"/>
-              <a:t>31/12/2025</a:t>
+              <a:t>2/1/2026</a:t>
             </a:fld>
             <a:endParaRPr lang="en-US"/>
           </a:p>
@@ -3353,7 +3355,7 @@
           <a:p>
             <a:fld id="{7DDFA97A-BFF9-4472-9471-4DBD18C6FCF5}" type="datetimeFigureOut">
               <a:rPr lang="en-US" smtClean="0"/>
-              <a:t>31/12/2025</a:t>
+              <a:t>2/1/2026</a:t>
             </a:fld>
             <a:endParaRPr lang="en-US"/>
           </a:p>
@@ -3856,6 +3858,325 @@
     <p:extLst>
       <p:ext uri="{BB962C8B-B14F-4D97-AF65-F5344CB8AC3E}">
         <p14:creationId xmlns:p14="http://schemas.microsoft.com/office/powerpoint/2010/main" val="3251081791"/>
+      </p:ext>
+    </p:extLst>
+  </p:cSld>
+  <p:clrMapOvr>
+    <a:masterClrMapping/>
+  </p:clrMapOvr>
+</p:sld>
+</file>
+
+<file path=ppt/slides/slide10.xml><?xml version="1.0" encoding="utf-8"?>
+<p:sld xmlns:a="http://schemas.openxmlformats.org/drawingml/2006/main" xmlns:r="http://schemas.openxmlformats.org/officeDocument/2006/relationships" xmlns:p="http://schemas.openxmlformats.org/presentationml/2006/main">
+  <p:cSld>
+    <p:spTree>
+      <p:nvGrpSpPr>
+        <p:cNvPr id="1" name=""/>
+        <p:cNvGrpSpPr/>
+        <p:nvPr/>
+      </p:nvGrpSpPr>
+      <p:grpSpPr>
+        <a:xfrm>
+          <a:off x="0" y="0"/>
+          <a:ext cx="0" cy="0"/>
+          <a:chOff x="0" y="0"/>
+          <a:chExt cx="0" cy="0"/>
+        </a:xfrm>
+      </p:grpSpPr>
+      <p:pic>
+        <p:nvPicPr>
+          <p:cNvPr id="3" name="Picture 2" descr="A screenshot of a computer&#10;&#10;AI-generated content may be incorrect.">
+            <a:extLst>
+              <a:ext uri="{FF2B5EF4-FFF2-40B4-BE49-F238E27FC236}">
+                <a16:creationId xmlns:a16="http://schemas.microsoft.com/office/drawing/2014/main" id="{CF0D3AA7-9D01-4B4C-8551-F3C097EE1103}"/>
+              </a:ext>
+            </a:extLst>
+          </p:cNvPr>
+          <p:cNvPicPr>
+            <a:picLocks noChangeAspect="1"/>
+          </p:cNvPicPr>
+          <p:nvPr/>
+        </p:nvPicPr>
+        <p:blipFill>
+          <a:blip r:embed="rId2"/>
+          <a:stretch>
+            <a:fillRect/>
+          </a:stretch>
+        </p:blipFill>
+        <p:spPr>
+          <a:xfrm>
+            <a:off x="864705" y="834664"/>
+            <a:ext cx="4432224" cy="4860458"/>
+          </a:xfrm>
+          <a:prstGeom prst="rect">
+            <a:avLst/>
+          </a:prstGeom>
+        </p:spPr>
+      </p:pic>
+      <p:pic>
+        <p:nvPicPr>
+          <p:cNvPr id="5" name="Picture 4" descr="A screen shot of a computer program&#10;&#10;AI-generated content may be incorrect.">
+            <a:extLst>
+              <a:ext uri="{FF2B5EF4-FFF2-40B4-BE49-F238E27FC236}">
+                <a16:creationId xmlns:a16="http://schemas.microsoft.com/office/drawing/2014/main" id="{522A7734-842E-648A-BD24-85A2A6ADC82D}"/>
+              </a:ext>
+            </a:extLst>
+          </p:cNvPr>
+          <p:cNvPicPr>
+            <a:picLocks noChangeAspect="1"/>
+          </p:cNvPicPr>
+          <p:nvPr/>
+        </p:nvPicPr>
+        <p:blipFill>
+          <a:blip r:embed="rId3"/>
+          <a:stretch>
+            <a:fillRect/>
+          </a:stretch>
+        </p:blipFill>
+        <p:spPr>
+          <a:xfrm>
+            <a:off x="5506988" y="834664"/>
+            <a:ext cx="5913024" cy="3022100"/>
+          </a:xfrm>
+          <a:prstGeom prst="rect">
+            <a:avLst/>
+          </a:prstGeom>
+        </p:spPr>
+      </p:pic>
+    </p:spTree>
+    <p:extLst>
+      <p:ext uri="{BB962C8B-B14F-4D97-AF65-F5344CB8AC3E}">
+        <p14:creationId xmlns:p14="http://schemas.microsoft.com/office/powerpoint/2010/main" val="447995777"/>
+      </p:ext>
+    </p:extLst>
+  </p:cSld>
+  <p:clrMapOvr>
+    <a:masterClrMapping/>
+  </p:clrMapOvr>
+</p:sld>
+</file>
+
+<file path=ppt/slides/slide11.xml><?xml version="1.0" encoding="utf-8"?>
+<p:sld xmlns:a="http://schemas.openxmlformats.org/drawingml/2006/main" xmlns:r="http://schemas.openxmlformats.org/officeDocument/2006/relationships" xmlns:p="http://schemas.openxmlformats.org/presentationml/2006/main">
+  <p:cSld>
+    <p:spTree>
+      <p:nvGrpSpPr>
+        <p:cNvPr id="1" name=""/>
+        <p:cNvGrpSpPr/>
+        <p:nvPr/>
+      </p:nvGrpSpPr>
+      <p:grpSpPr>
+        <a:xfrm>
+          <a:off x="0" y="0"/>
+          <a:ext cx="0" cy="0"/>
+          <a:chOff x="0" y="0"/>
+          <a:chExt cx="0" cy="0"/>
+        </a:xfrm>
+      </p:grpSpPr>
+      <p:sp>
+        <p:nvSpPr>
+          <p:cNvPr id="6" name="TextBox 5">
+            <a:extLst>
+              <a:ext uri="{FF2B5EF4-FFF2-40B4-BE49-F238E27FC236}">
+                <a16:creationId xmlns:a16="http://schemas.microsoft.com/office/drawing/2014/main" id="{DEE48BA3-A457-7560-9476-9E31A38277C0}"/>
+              </a:ext>
+            </a:extLst>
+          </p:cNvPr>
+          <p:cNvSpPr txBox="1"/>
+          <p:nvPr/>
+        </p:nvSpPr>
+        <p:spPr>
+          <a:xfrm>
+            <a:off x="2141113" y="2173372"/>
+            <a:ext cx="7133021" cy="369332"/>
+          </a:xfrm>
+          <a:prstGeom prst="rect">
+            <a:avLst/>
+          </a:prstGeom>
+          <a:noFill/>
+        </p:spPr>
+        <p:txBody>
+          <a:bodyPr wrap="square">
+            <a:spAutoFit/>
+          </a:bodyPr>
+          <a:lstStyle/>
+          <a:p>
+            <a:r>
+              <a:rPr lang="en-US">
+                <a:hlinkClick r:id="rId2"/>
+              </a:rPr>
+              <a:t>https://huggingface.co/google/vit-base-patch16-224</a:t>
+            </a:r>
+            <a:r>
+              <a:rPr lang="en-US"/>
+              <a:t> (model)</a:t>
+            </a:r>
+          </a:p>
+        </p:txBody>
+      </p:sp>
+      <p:sp>
+        <p:nvSpPr>
+          <p:cNvPr id="10" name="TextBox 9">
+            <a:extLst>
+              <a:ext uri="{FF2B5EF4-FFF2-40B4-BE49-F238E27FC236}">
+                <a16:creationId xmlns:a16="http://schemas.microsoft.com/office/drawing/2014/main" id="{DA59ED0C-784A-8127-B166-5838B35378DC}"/>
+              </a:ext>
+            </a:extLst>
+          </p:cNvPr>
+          <p:cNvSpPr txBox="1"/>
+          <p:nvPr/>
+        </p:nvSpPr>
+        <p:spPr>
+          <a:xfrm>
+            <a:off x="2141113" y="2811096"/>
+            <a:ext cx="6096000" cy="369332"/>
+          </a:xfrm>
+          <a:prstGeom prst="rect">
+            <a:avLst/>
+          </a:prstGeom>
+          <a:noFill/>
+        </p:spPr>
+        <p:txBody>
+          <a:bodyPr wrap="square">
+            <a:spAutoFit/>
+          </a:bodyPr>
+          <a:lstStyle/>
+          <a:p>
+            <a:r>
+              <a:rPr lang="en-US">
+                <a:hlinkClick r:id="rId3"/>
+              </a:rPr>
+              <a:t>https://arxiv.org/pdf/2010.11929</a:t>
+            </a:r>
+            <a:r>
+              <a:rPr lang="en-US"/>
+              <a:t> (bài báo về model)</a:t>
+            </a:r>
+          </a:p>
+        </p:txBody>
+      </p:sp>
+      <p:sp>
+        <p:nvSpPr>
+          <p:cNvPr id="14" name="TextBox 13">
+            <a:extLst>
+              <a:ext uri="{FF2B5EF4-FFF2-40B4-BE49-F238E27FC236}">
+                <a16:creationId xmlns:a16="http://schemas.microsoft.com/office/drawing/2014/main" id="{C1E562D4-D788-7DD8-9E41-BFF1CC4E86D5}"/>
+              </a:ext>
+            </a:extLst>
+          </p:cNvPr>
+          <p:cNvSpPr txBox="1"/>
+          <p:nvPr/>
+        </p:nvSpPr>
+        <p:spPr>
+          <a:xfrm>
+            <a:off x="2141113" y="3295472"/>
+            <a:ext cx="7690165" cy="369332"/>
+          </a:xfrm>
+          <a:prstGeom prst="rect">
+            <a:avLst/>
+          </a:prstGeom>
+          <a:noFill/>
+        </p:spPr>
+        <p:txBody>
+          <a:bodyPr wrap="square">
+            <a:spAutoFit/>
+          </a:bodyPr>
+          <a:lstStyle/>
+          <a:p>
+            <a:r>
+              <a:rPr lang="en-US">
+                <a:hlinkClick r:id="rId4"/>
+              </a:rPr>
+              <a:t>https://www.nature.com/articles/sdata2018161</a:t>
+            </a:r>
+            <a:r>
+              <a:rPr lang="en-US"/>
+              <a:t> (bài báo về dataset)</a:t>
+            </a:r>
+          </a:p>
+        </p:txBody>
+      </p:sp>
+      <p:sp>
+        <p:nvSpPr>
+          <p:cNvPr id="18" name="TextBox 17">
+            <a:extLst>
+              <a:ext uri="{FF2B5EF4-FFF2-40B4-BE49-F238E27FC236}">
+                <a16:creationId xmlns:a16="http://schemas.microsoft.com/office/drawing/2014/main" id="{B644078B-CD83-16E6-F651-912129CA9F88}"/>
+              </a:ext>
+            </a:extLst>
+          </p:cNvPr>
+          <p:cNvSpPr txBox="1"/>
+          <p:nvPr/>
+        </p:nvSpPr>
+        <p:spPr>
+          <a:xfrm>
+            <a:off x="2141113" y="3933196"/>
+            <a:ext cx="7416480" cy="923330"/>
+          </a:xfrm>
+          <a:prstGeom prst="rect">
+            <a:avLst/>
+          </a:prstGeom>
+          <a:noFill/>
+        </p:spPr>
+        <p:txBody>
+          <a:bodyPr wrap="square">
+            <a:spAutoFit/>
+          </a:bodyPr>
+          <a:lstStyle/>
+          <a:p>
+            <a:r>
+              <a:rPr lang="en-US">
+                <a:hlinkClick r:id="rId5"/>
+              </a:rPr>
+              <a:t>https://www.researchgate.net/publication/384018286_Comprehensive_comparison_between_vision_transformers_and_convolutional_neural_networks_for_face_recognition_tasks</a:t>
+            </a:r>
+            <a:r>
+              <a:rPr lang="en-US"/>
+              <a:t> (so sánh CNN, ViT)</a:t>
+            </a:r>
+          </a:p>
+        </p:txBody>
+      </p:sp>
+      <p:sp>
+        <p:nvSpPr>
+          <p:cNvPr id="19" name="TextBox 18">
+            <a:extLst>
+              <a:ext uri="{FF2B5EF4-FFF2-40B4-BE49-F238E27FC236}">
+                <a16:creationId xmlns:a16="http://schemas.microsoft.com/office/drawing/2014/main" id="{B2337F1D-93B3-3A28-1340-72562765068C}"/>
+              </a:ext>
+            </a:extLst>
+          </p:cNvPr>
+          <p:cNvSpPr txBox="1"/>
+          <p:nvPr/>
+        </p:nvSpPr>
+        <p:spPr>
+          <a:xfrm>
+            <a:off x="404910" y="520861"/>
+            <a:ext cx="2339936" cy="646331"/>
+          </a:xfrm>
+          <a:prstGeom prst="rect">
+            <a:avLst/>
+          </a:prstGeom>
+          <a:noFill/>
+        </p:spPr>
+        <p:txBody>
+          <a:bodyPr wrap="none" rtlCol="0">
+            <a:spAutoFit/>
+          </a:bodyPr>
+          <a:lstStyle/>
+          <a:p>
+            <a:r>
+              <a:rPr lang="en-US" sz="3600" b="1"/>
+              <a:t>Reference</a:t>
+            </a:r>
+          </a:p>
+        </p:txBody>
+      </p:sp>
+    </p:spTree>
+    <p:extLst>
+      <p:ext uri="{BB962C8B-B14F-4D97-AF65-F5344CB8AC3E}">
+        <p14:creationId xmlns:p14="http://schemas.microsoft.com/office/powerpoint/2010/main" val="98599837"/>
       </p:ext>
     </p:extLst>
   </p:cSld>
@@ -5821,8 +6142,8 @@
           </a:p>
         </p:txBody>
       </p:sp>
-      <mc:AlternateContent xmlns:mc="http://schemas.openxmlformats.org/markup-compatibility/2006">
-        <mc:Choice xmlns:a14="http://schemas.microsoft.com/office/drawing/2010/main" Requires="a14">
+      <mc:AlternateContent xmlns:mc="http://schemas.openxmlformats.org/markup-compatibility/2006" xmlns:a14="http://schemas.microsoft.com/office/drawing/2010/main">
+        <mc:Choice Requires="a14">
           <p:sp>
             <p:nvSpPr>
               <p:cNvPr id="4" name="TextBox 3">
@@ -5851,6 +6172,7 @@
               </a:bodyPr>
               <a:lstStyle/>
               <a:p>
+                <a:pPr/>
                 <a14:m>
                   <m:oMathPara xmlns:m="http://schemas.openxmlformats.org/officeDocument/2006/math">
                     <m:oMathParaPr>
@@ -6010,7 +6332,7 @@
             </p:txBody>
           </p:sp>
         </mc:Choice>
-        <mc:Fallback>
+        <mc:Fallback xmlns="">
           <p:sp>
             <p:nvSpPr>
               <p:cNvPr id="4" name="TextBox 3">
@@ -7041,6 +7363,62 @@
           </a:p>
         </p:txBody>
       </p:sp>
+      <p:pic>
+        <p:nvPicPr>
+          <p:cNvPr id="2" name="Picture 2" descr="Most Popular Dog Breeds: America's 50 Favorite Dogs">
+            <a:extLst>
+              <a:ext uri="{FF2B5EF4-FFF2-40B4-BE49-F238E27FC236}">
+                <a16:creationId xmlns:a16="http://schemas.microsoft.com/office/drawing/2014/main" id="{8F071501-B059-4740-D16A-69408208946D}"/>
+              </a:ext>
+            </a:extLst>
+          </p:cNvPr>
+          <p:cNvPicPr>
+            <a:picLocks noChangeAspect="1" noChangeArrowheads="1"/>
+          </p:cNvPicPr>
+          <p:nvPr/>
+        </p:nvPicPr>
+        <p:blipFill>
+          <a:blip r:embed="rId3">
+            <a:extLst>
+              <a:ext uri="{28A0092B-C50C-407E-A947-70E740481C1C}">
+                <a14:useLocalDpi xmlns:a14="http://schemas.microsoft.com/office/drawing/2010/main" val="0"/>
+              </a:ext>
+            </a:extLst>
+          </a:blip>
+          <a:srcRect/>
+          <a:stretch>
+            <a:fillRect/>
+          </a:stretch>
+        </p:blipFill>
+        <p:spPr bwMode="auto">
+          <a:xfrm>
+            <a:off x="6096000" y="5149164"/>
+            <a:ext cx="1525905" cy="1521678"/>
+          </a:xfrm>
+          <a:prstGeom prst="rect">
+            <a:avLst/>
+          </a:prstGeom>
+          <a:ln>
+            <a:noFill/>
+          </a:ln>
+          <a:effectLst>
+            <a:outerShdw blurRad="292100" dist="139700" dir="2700000" algn="tl" rotWithShape="0">
+              <a:srgbClr val="333333">
+                <a:alpha val="65000"/>
+              </a:srgbClr>
+            </a:outerShdw>
+          </a:effectLst>
+          <a:extLst>
+            <a:ext uri="{909E8E84-426E-40DD-AFC4-6F175D3DCCD1}">
+              <a14:hiddenFill xmlns:a14="http://schemas.microsoft.com/office/drawing/2010/main">
+                <a:solidFill>
+                  <a:srgbClr val="FFFFFF"/>
+                </a:solidFill>
+              </a14:hiddenFill>
+            </a:ext>
+          </a:extLst>
+        </p:spPr>
+      </p:pic>
     </p:spTree>
     <p:extLst>
       <p:ext uri="{BB962C8B-B14F-4D97-AF65-F5344CB8AC3E}">
@@ -7279,10 +7657,121 @@
       </p:grpSpPr>
       <p:sp>
         <p:nvSpPr>
-          <p:cNvPr id="6" name="TextBox 5">
-            <a:extLst>
-              <a:ext uri="{FF2B5EF4-FFF2-40B4-BE49-F238E27FC236}">
-                <a16:creationId xmlns:a16="http://schemas.microsoft.com/office/drawing/2014/main" id="{DEE48BA3-A457-7560-9476-9E31A38277C0}"/>
+          <p:cNvPr id="3" name="Cube 2">
+            <a:extLst>
+              <a:ext uri="{FF2B5EF4-FFF2-40B4-BE49-F238E27FC236}">
+                <a16:creationId xmlns:a16="http://schemas.microsoft.com/office/drawing/2014/main" id="{2076C9AE-C264-2B95-FDDB-3C5995D8D7A8}"/>
+              </a:ext>
+            </a:extLst>
+          </p:cNvPr>
+          <p:cNvSpPr/>
+          <p:nvPr/>
+        </p:nvSpPr>
+        <p:spPr>
+          <a:xfrm rot="16200000">
+            <a:off x="1025022" y="2177860"/>
+            <a:ext cx="3248247" cy="845556"/>
+          </a:xfrm>
+          <a:prstGeom prst="cube">
+            <a:avLst>
+              <a:gd name="adj" fmla="val 74519"/>
+            </a:avLst>
+          </a:prstGeom>
+          <a:solidFill>
+            <a:schemeClr val="tx2">
+              <a:lumMod val="50000"/>
+              <a:lumOff val="50000"/>
+              <a:alpha val="39000"/>
+            </a:schemeClr>
+          </a:solidFill>
+        </p:spPr>
+        <p:style>
+          <a:lnRef idx="2">
+            <a:schemeClr val="accent1">
+              <a:shade val="15000"/>
+            </a:schemeClr>
+          </a:lnRef>
+          <a:fillRef idx="1">
+            <a:schemeClr val="accent1"/>
+          </a:fillRef>
+          <a:effectRef idx="0">
+            <a:schemeClr val="accent1"/>
+          </a:effectRef>
+          <a:fontRef idx="minor">
+            <a:schemeClr val="lt1"/>
+          </a:fontRef>
+        </p:style>
+        <p:txBody>
+          <a:bodyPr rtlCol="0" anchor="ctr"/>
+          <a:lstStyle/>
+          <a:p>
+            <a:pPr algn="ctr"/>
+            <a:endParaRPr lang="en-US"/>
+          </a:p>
+        </p:txBody>
+      </p:sp>
+      <p:pic>
+        <p:nvPicPr>
+          <p:cNvPr id="2" name="Picture 2" descr="Most Popular Dog Breeds: America's 50 Favorite Dogs">
+            <a:extLst>
+              <a:ext uri="{FF2B5EF4-FFF2-40B4-BE49-F238E27FC236}">
+                <a16:creationId xmlns:a16="http://schemas.microsoft.com/office/drawing/2014/main" id="{B7D091D2-3E02-669B-5F15-5C077219ADDF}"/>
+              </a:ext>
+            </a:extLst>
+          </p:cNvPr>
+          <p:cNvPicPr>
+            <a:picLocks noChangeAspect="1" noChangeArrowheads="1"/>
+          </p:cNvPicPr>
+          <p:nvPr/>
+        </p:nvPicPr>
+        <p:blipFill>
+          <a:blip r:embed="rId2">
+            <a:extLst>
+              <a:ext uri="{28A0092B-C50C-407E-A947-70E740481C1C}">
+                <a14:useLocalDpi xmlns:a14="http://schemas.microsoft.com/office/drawing/2010/main" val="0"/>
+              </a:ext>
+            </a:extLst>
+          </a:blip>
+          <a:srcRect/>
+          <a:stretch>
+            <a:fillRect/>
+          </a:stretch>
+        </p:blipFill>
+        <p:spPr bwMode="auto">
+          <a:xfrm>
+            <a:off x="126428" y="2123536"/>
+            <a:ext cx="1447625" cy="1384989"/>
+          </a:xfrm>
+          <a:prstGeom prst="rect">
+            <a:avLst/>
+          </a:prstGeom>
+          <a:ln>
+            <a:noFill/>
+          </a:ln>
+          <a:effectLst>
+            <a:outerShdw blurRad="292100" dist="139700" dir="2700000" algn="tl" rotWithShape="0">
+              <a:srgbClr val="333333">
+                <a:alpha val="65000"/>
+              </a:srgbClr>
+            </a:outerShdw>
+          </a:effectLst>
+          <a:extLst>
+            <a:ext uri="{909E8E84-426E-40DD-AFC4-6F175D3DCCD1}">
+              <a14:hiddenFill xmlns:a14="http://schemas.microsoft.com/office/drawing/2010/main">
+                <a:solidFill>
+                  <a:srgbClr val="FFFFFF"/>
+                </a:solidFill>
+              </a14:hiddenFill>
+            </a:ext>
+          </a:extLst>
+        </p:spPr>
+      </p:pic>
+      <p:sp>
+        <p:nvSpPr>
+          <p:cNvPr id="4" name="TextBox 3">
+            <a:extLst>
+              <a:ext uri="{FF2B5EF4-FFF2-40B4-BE49-F238E27FC236}">
+                <a16:creationId xmlns:a16="http://schemas.microsoft.com/office/drawing/2014/main" id="{38FF24CD-3EAD-DFA7-7049-C89318DA26EE}"/>
               </a:ext>
             </a:extLst>
           </p:cNvPr>
@@ -7291,39 +7780,217 @@
         </p:nvSpPr>
         <p:spPr>
           <a:xfrm>
-            <a:off x="2141113" y="2173372"/>
-            <a:ext cx="7133021" cy="369332"/>
+            <a:off x="305958" y="4287688"/>
+            <a:ext cx="1522578" cy="461665"/>
           </a:xfrm>
           <a:prstGeom prst="rect">
             <a:avLst/>
           </a:prstGeom>
           <a:noFill/>
-        </p:spPr>
-        <p:txBody>
-          <a:bodyPr wrap="square">
+          <a:ln>
+            <a:solidFill>
+              <a:schemeClr val="tx1"/>
+            </a:solidFill>
+          </a:ln>
+        </p:spPr>
+        <p:txBody>
+          <a:bodyPr wrap="square" rtlCol="0">
             <a:spAutoFit/>
           </a:bodyPr>
           <a:lstStyle/>
           <a:p>
             <a:r>
-              <a:rPr lang="en-US">
-                <a:hlinkClick r:id="rId2"/>
-              </a:rPr>
-              <a:t>https://huggingface.co/google/vit-base-patch16-224</a:t>
-            </a:r>
-            <a:r>
-              <a:rPr lang="en-US"/>
-              <a:t> (model)</a:t>
-            </a:r>
-          </a:p>
-        </p:txBody>
-      </p:sp>
-      <p:sp>
-        <p:nvSpPr>
-          <p:cNvPr id="10" name="TextBox 9">
-            <a:extLst>
-              <a:ext uri="{FF2B5EF4-FFF2-40B4-BE49-F238E27FC236}">
-                <a16:creationId xmlns:a16="http://schemas.microsoft.com/office/drawing/2014/main" id="{DA59ED0C-784A-8127-B166-5838B35378DC}"/>
+              <a:rPr lang="en-US" sz="800"/>
+              <a:t>Input Image 224x224x3 (RGB)</a:t>
+            </a:r>
+          </a:p>
+          <a:p>
+            <a:r>
+              <a:rPr lang="en-US" sz="800"/>
+              <a:t>Nomalize: mean = 0.5, 0.5, 0.5</a:t>
+            </a:r>
+          </a:p>
+          <a:p>
+            <a:r>
+              <a:rPr lang="en-US" sz="800"/>
+              <a:t>Std = 0.5, 0.5, 0.5</a:t>
+            </a:r>
+          </a:p>
+        </p:txBody>
+      </p:sp>
+      <p:sp>
+        <p:nvSpPr>
+          <p:cNvPr id="6" name="Cube 5">
+            <a:extLst>
+              <a:ext uri="{FF2B5EF4-FFF2-40B4-BE49-F238E27FC236}">
+                <a16:creationId xmlns:a16="http://schemas.microsoft.com/office/drawing/2014/main" id="{54B35231-73E0-1880-3708-AAD998A140D8}"/>
+              </a:ext>
+            </a:extLst>
+          </p:cNvPr>
+          <p:cNvSpPr/>
+          <p:nvPr/>
+        </p:nvSpPr>
+        <p:spPr>
+          <a:xfrm rot="16200000">
+            <a:off x="2176505" y="2261422"/>
+            <a:ext cx="3248249" cy="673456"/>
+          </a:xfrm>
+          <a:prstGeom prst="cube">
+            <a:avLst>
+              <a:gd name="adj" fmla="val 74519"/>
+            </a:avLst>
+          </a:prstGeom>
+          <a:solidFill>
+            <a:srgbClr val="FFFF00">
+              <a:alpha val="39000"/>
+            </a:srgbClr>
+          </a:solidFill>
+        </p:spPr>
+        <p:style>
+          <a:lnRef idx="2">
+            <a:schemeClr val="accent1">
+              <a:shade val="15000"/>
+            </a:schemeClr>
+          </a:lnRef>
+          <a:fillRef idx="1">
+            <a:schemeClr val="accent1"/>
+          </a:fillRef>
+          <a:effectRef idx="0">
+            <a:schemeClr val="accent1"/>
+          </a:effectRef>
+          <a:fontRef idx="minor">
+            <a:schemeClr val="lt1"/>
+          </a:fontRef>
+        </p:style>
+        <p:txBody>
+          <a:bodyPr rtlCol="0" anchor="ctr"/>
+          <a:lstStyle/>
+          <a:p>
+            <a:pPr algn="ctr"/>
+            <a:endParaRPr lang="en-US"/>
+          </a:p>
+        </p:txBody>
+      </p:sp>
+      <p:sp>
+        <p:nvSpPr>
+          <p:cNvPr id="7" name="Cube 6">
+            <a:extLst>
+              <a:ext uri="{FF2B5EF4-FFF2-40B4-BE49-F238E27FC236}">
+                <a16:creationId xmlns:a16="http://schemas.microsoft.com/office/drawing/2014/main" id="{C061FBF8-BF6E-B8D5-E8F3-13D9AF5A41C6}"/>
+              </a:ext>
+            </a:extLst>
+          </p:cNvPr>
+          <p:cNvSpPr/>
+          <p:nvPr/>
+        </p:nvSpPr>
+        <p:spPr>
+          <a:xfrm rot="16200000">
+            <a:off x="3231152" y="2261421"/>
+            <a:ext cx="3248249" cy="673458"/>
+          </a:xfrm>
+          <a:prstGeom prst="cube">
+            <a:avLst>
+              <a:gd name="adj" fmla="val 74519"/>
+            </a:avLst>
+          </a:prstGeom>
+          <a:solidFill>
+            <a:schemeClr val="accent1">
+              <a:alpha val="39000"/>
+            </a:schemeClr>
+          </a:solidFill>
+        </p:spPr>
+        <p:style>
+          <a:lnRef idx="2">
+            <a:schemeClr val="accent1">
+              <a:shade val="15000"/>
+            </a:schemeClr>
+          </a:lnRef>
+          <a:fillRef idx="1">
+            <a:schemeClr val="accent1"/>
+          </a:fillRef>
+          <a:effectRef idx="0">
+            <a:schemeClr val="accent1"/>
+          </a:effectRef>
+          <a:fontRef idx="minor">
+            <a:schemeClr val="lt1"/>
+          </a:fontRef>
+        </p:style>
+        <p:txBody>
+          <a:bodyPr rtlCol="0" anchor="ctr"/>
+          <a:lstStyle/>
+          <a:p>
+            <a:pPr algn="ctr"/>
+            <a:endParaRPr lang="en-US"/>
+          </a:p>
+        </p:txBody>
+      </p:sp>
+      <p:sp>
+        <p:nvSpPr>
+          <p:cNvPr id="8" name="Cube 7">
+            <a:extLst>
+              <a:ext uri="{FF2B5EF4-FFF2-40B4-BE49-F238E27FC236}">
+                <a16:creationId xmlns:a16="http://schemas.microsoft.com/office/drawing/2014/main" id="{5C7A0E3A-B9CF-7F23-2DCB-C7D8844B65AC}"/>
+              </a:ext>
+            </a:extLst>
+          </p:cNvPr>
+          <p:cNvSpPr/>
+          <p:nvPr/>
+        </p:nvSpPr>
+        <p:spPr>
+          <a:xfrm rot="16200000">
+            <a:off x="6083258" y="322752"/>
+            <a:ext cx="3268133" cy="4530912"/>
+          </a:xfrm>
+          <a:prstGeom prst="cube">
+            <a:avLst>
+              <a:gd name="adj" fmla="val 16005"/>
+            </a:avLst>
+          </a:prstGeom>
+          <a:solidFill>
+            <a:srgbClr val="FF0000">
+              <a:alpha val="6000"/>
+            </a:srgbClr>
+          </a:solidFill>
+          <a:ln>
+            <a:solidFill>
+              <a:schemeClr val="accent1">
+                <a:shade val="15000"/>
+                <a:alpha val="14000"/>
+              </a:schemeClr>
+            </a:solidFill>
+          </a:ln>
+        </p:spPr>
+        <p:style>
+          <a:lnRef idx="2">
+            <a:schemeClr val="accent1">
+              <a:shade val="15000"/>
+            </a:schemeClr>
+          </a:lnRef>
+          <a:fillRef idx="1">
+            <a:schemeClr val="accent1"/>
+          </a:fillRef>
+          <a:effectRef idx="0">
+            <a:schemeClr val="accent1"/>
+          </a:effectRef>
+          <a:fontRef idx="minor">
+            <a:schemeClr val="lt1"/>
+          </a:fontRef>
+        </p:style>
+        <p:txBody>
+          <a:bodyPr rtlCol="0" anchor="ctr"/>
+          <a:lstStyle/>
+          <a:p>
+            <a:pPr algn="ctr"/>
+            <a:endParaRPr lang="en-US"/>
+          </a:p>
+        </p:txBody>
+      </p:sp>
+      <p:sp>
+        <p:nvSpPr>
+          <p:cNvPr id="9" name="TextBox 8">
+            <a:extLst>
+              <a:ext uri="{FF2B5EF4-FFF2-40B4-BE49-F238E27FC236}">
+                <a16:creationId xmlns:a16="http://schemas.microsoft.com/office/drawing/2014/main" id="{BB7AB949-89CA-2045-C2EB-4C89AA990E9F}"/>
               </a:ext>
             </a:extLst>
           </p:cNvPr>
@@ -7332,8 +7999,8 @@
         </p:nvSpPr>
         <p:spPr>
           <a:xfrm>
-            <a:off x="2141113" y="2811096"/>
-            <a:ext cx="6096000" cy="369332"/>
+            <a:off x="4502967" y="248479"/>
+            <a:ext cx="3186065" cy="369332"/>
           </a:xfrm>
           <a:prstGeom prst="rect">
             <a:avLst/>
@@ -7341,30 +8008,595 @@
           <a:noFill/>
         </p:spPr>
         <p:txBody>
-          <a:bodyPr wrap="square">
+          <a:bodyPr wrap="none" rtlCol="0">
             <a:spAutoFit/>
           </a:bodyPr>
           <a:lstStyle/>
           <a:p>
             <a:r>
-              <a:rPr lang="en-US">
-                <a:hlinkClick r:id="rId3"/>
-              </a:rPr>
-              <a:t>https://arxiv.org/pdf/2010.11929</a:t>
-            </a:r>
-            <a:r>
-              <a:rPr lang="en-US"/>
-              <a:t> (bài báo về model)</a:t>
-            </a:r>
-          </a:p>
-        </p:txBody>
-      </p:sp>
-      <p:sp>
-        <p:nvSpPr>
-          <p:cNvPr id="14" name="TextBox 13">
-            <a:extLst>
-              <a:ext uri="{FF2B5EF4-FFF2-40B4-BE49-F238E27FC236}">
-                <a16:creationId xmlns:a16="http://schemas.microsoft.com/office/drawing/2014/main" id="{C1E562D4-D788-7DD8-9E41-BFF1CC4E86D5}"/>
+              <a:rPr lang="en-US" b="1"/>
+              <a:t>google/vit-base-patch16-224</a:t>
+            </a:r>
+          </a:p>
+        </p:txBody>
+      </p:sp>
+      <p:sp>
+        <p:nvSpPr>
+          <p:cNvPr id="10" name="Cube 9">
+            <a:extLst>
+              <a:ext uri="{FF2B5EF4-FFF2-40B4-BE49-F238E27FC236}">
+                <a16:creationId xmlns:a16="http://schemas.microsoft.com/office/drawing/2014/main" id="{CF9524E3-A47D-7910-48A8-2B16F107681C}"/>
+              </a:ext>
+            </a:extLst>
+          </p:cNvPr>
+          <p:cNvSpPr/>
+          <p:nvPr/>
+        </p:nvSpPr>
+        <p:spPr>
+          <a:xfrm rot="16200000">
+            <a:off x="4707942" y="2228156"/>
+            <a:ext cx="3251413" cy="703387"/>
+          </a:xfrm>
+          <a:prstGeom prst="cube">
+            <a:avLst>
+              <a:gd name="adj" fmla="val 74519"/>
+            </a:avLst>
+          </a:prstGeom>
+          <a:solidFill>
+            <a:schemeClr val="tx1">
+              <a:lumMod val="50000"/>
+              <a:lumOff val="50000"/>
+              <a:alpha val="39000"/>
+            </a:schemeClr>
+          </a:solidFill>
+        </p:spPr>
+        <p:style>
+          <a:lnRef idx="2">
+            <a:schemeClr val="accent1">
+              <a:shade val="15000"/>
+            </a:schemeClr>
+          </a:lnRef>
+          <a:fillRef idx="1">
+            <a:schemeClr val="accent1"/>
+          </a:fillRef>
+          <a:effectRef idx="0">
+            <a:schemeClr val="accent1"/>
+          </a:effectRef>
+          <a:fontRef idx="minor">
+            <a:schemeClr val="lt1"/>
+          </a:fontRef>
+        </p:style>
+        <p:txBody>
+          <a:bodyPr rtlCol="0" anchor="ctr"/>
+          <a:lstStyle/>
+          <a:p>
+            <a:pPr algn="ctr"/>
+            <a:endParaRPr lang="en-US"/>
+          </a:p>
+        </p:txBody>
+      </p:sp>
+      <p:sp>
+        <p:nvSpPr>
+          <p:cNvPr id="11" name="Cube 10">
+            <a:extLst>
+              <a:ext uri="{FF2B5EF4-FFF2-40B4-BE49-F238E27FC236}">
+                <a16:creationId xmlns:a16="http://schemas.microsoft.com/office/drawing/2014/main" id="{748626EA-FB4C-78BD-0F56-7C7163DE0285}"/>
+              </a:ext>
+            </a:extLst>
+          </p:cNvPr>
+          <p:cNvSpPr/>
+          <p:nvPr/>
+        </p:nvSpPr>
+        <p:spPr>
+          <a:xfrm rot="16200000">
+            <a:off x="5811190" y="2228156"/>
+            <a:ext cx="3251413" cy="703387"/>
+          </a:xfrm>
+          <a:prstGeom prst="cube">
+            <a:avLst>
+              <a:gd name="adj" fmla="val 74519"/>
+            </a:avLst>
+          </a:prstGeom>
+          <a:solidFill>
+            <a:srgbClr val="FFC000">
+              <a:alpha val="39000"/>
+            </a:srgbClr>
+          </a:solidFill>
+        </p:spPr>
+        <p:style>
+          <a:lnRef idx="2">
+            <a:schemeClr val="accent1">
+              <a:shade val="15000"/>
+            </a:schemeClr>
+          </a:lnRef>
+          <a:fillRef idx="1">
+            <a:schemeClr val="accent1"/>
+          </a:fillRef>
+          <a:effectRef idx="0">
+            <a:schemeClr val="accent1"/>
+          </a:effectRef>
+          <a:fontRef idx="minor">
+            <a:schemeClr val="lt1"/>
+          </a:fontRef>
+        </p:style>
+        <p:txBody>
+          <a:bodyPr rtlCol="0" anchor="ctr"/>
+          <a:lstStyle/>
+          <a:p>
+            <a:pPr algn="ctr"/>
+            <a:endParaRPr lang="en-US"/>
+          </a:p>
+        </p:txBody>
+      </p:sp>
+      <p:sp>
+        <p:nvSpPr>
+          <p:cNvPr id="12" name="Cube 11">
+            <a:extLst>
+              <a:ext uri="{FF2B5EF4-FFF2-40B4-BE49-F238E27FC236}">
+                <a16:creationId xmlns:a16="http://schemas.microsoft.com/office/drawing/2014/main" id="{01A3BA9C-FC34-18A0-5706-9DCD289620C8}"/>
+              </a:ext>
+            </a:extLst>
+          </p:cNvPr>
+          <p:cNvSpPr/>
+          <p:nvPr/>
+        </p:nvSpPr>
+        <p:spPr>
+          <a:xfrm rot="16200000">
+            <a:off x="6714101" y="2228155"/>
+            <a:ext cx="3251413" cy="703387"/>
+          </a:xfrm>
+          <a:prstGeom prst="cube">
+            <a:avLst>
+              <a:gd name="adj" fmla="val 74519"/>
+            </a:avLst>
+          </a:prstGeom>
+          <a:solidFill>
+            <a:schemeClr val="tx1">
+              <a:lumMod val="50000"/>
+              <a:lumOff val="50000"/>
+              <a:alpha val="39000"/>
+            </a:schemeClr>
+          </a:solidFill>
+        </p:spPr>
+        <p:style>
+          <a:lnRef idx="2">
+            <a:schemeClr val="accent1">
+              <a:shade val="15000"/>
+            </a:schemeClr>
+          </a:lnRef>
+          <a:fillRef idx="1">
+            <a:schemeClr val="accent1"/>
+          </a:fillRef>
+          <a:effectRef idx="0">
+            <a:schemeClr val="accent1"/>
+          </a:effectRef>
+          <a:fontRef idx="minor">
+            <a:schemeClr val="lt1"/>
+          </a:fontRef>
+        </p:style>
+        <p:txBody>
+          <a:bodyPr rtlCol="0" anchor="ctr"/>
+          <a:lstStyle/>
+          <a:p>
+            <a:pPr algn="ctr"/>
+            <a:endParaRPr lang="en-US"/>
+          </a:p>
+        </p:txBody>
+      </p:sp>
+      <p:sp>
+        <p:nvSpPr>
+          <p:cNvPr id="13" name="Cube 12">
+            <a:extLst>
+              <a:ext uri="{FF2B5EF4-FFF2-40B4-BE49-F238E27FC236}">
+                <a16:creationId xmlns:a16="http://schemas.microsoft.com/office/drawing/2014/main" id="{35B08DE3-6E6C-D2CB-50CD-B2297473E3ED}"/>
+              </a:ext>
+            </a:extLst>
+          </p:cNvPr>
+          <p:cNvSpPr/>
+          <p:nvPr/>
+        </p:nvSpPr>
+        <p:spPr>
+          <a:xfrm rot="16200000">
+            <a:off x="7590393" y="2248039"/>
+            <a:ext cx="3251413" cy="703384"/>
+          </a:xfrm>
+          <a:prstGeom prst="cube">
+            <a:avLst>
+              <a:gd name="adj" fmla="val 74519"/>
+            </a:avLst>
+          </a:prstGeom>
+          <a:solidFill>
+            <a:srgbClr val="00B050">
+              <a:alpha val="39000"/>
+            </a:srgbClr>
+          </a:solidFill>
+        </p:spPr>
+        <p:style>
+          <a:lnRef idx="2">
+            <a:schemeClr val="accent1">
+              <a:shade val="15000"/>
+            </a:schemeClr>
+          </a:lnRef>
+          <a:fillRef idx="1">
+            <a:schemeClr val="accent1"/>
+          </a:fillRef>
+          <a:effectRef idx="0">
+            <a:schemeClr val="accent1"/>
+          </a:effectRef>
+          <a:fontRef idx="minor">
+            <a:schemeClr val="lt1"/>
+          </a:fontRef>
+        </p:style>
+        <p:txBody>
+          <a:bodyPr rtlCol="0" anchor="ctr"/>
+          <a:lstStyle/>
+          <a:p>
+            <a:pPr algn="ctr"/>
+            <a:endParaRPr lang="en-US"/>
+          </a:p>
+        </p:txBody>
+      </p:sp>
+      <p:sp>
+        <p:nvSpPr>
+          <p:cNvPr id="15" name="Cube 14">
+            <a:extLst>
+              <a:ext uri="{FF2B5EF4-FFF2-40B4-BE49-F238E27FC236}">
+                <a16:creationId xmlns:a16="http://schemas.microsoft.com/office/drawing/2014/main" id="{DE8E9C98-77B5-2CEF-AD86-5FD5E67E4FA1}"/>
+              </a:ext>
+            </a:extLst>
+          </p:cNvPr>
+          <p:cNvSpPr/>
+          <p:nvPr/>
+        </p:nvSpPr>
+        <p:spPr>
+          <a:xfrm rot="16200000">
+            <a:off x="8945788" y="2228154"/>
+            <a:ext cx="3251413" cy="703387"/>
+          </a:xfrm>
+          <a:prstGeom prst="cube">
+            <a:avLst>
+              <a:gd name="adj" fmla="val 74519"/>
+            </a:avLst>
+          </a:prstGeom>
+          <a:solidFill>
+            <a:srgbClr val="D7CECE"/>
+          </a:solidFill>
+        </p:spPr>
+        <p:style>
+          <a:lnRef idx="2">
+            <a:schemeClr val="accent1">
+              <a:shade val="15000"/>
+            </a:schemeClr>
+          </a:lnRef>
+          <a:fillRef idx="1">
+            <a:schemeClr val="accent1"/>
+          </a:fillRef>
+          <a:effectRef idx="0">
+            <a:schemeClr val="accent1"/>
+          </a:effectRef>
+          <a:fontRef idx="minor">
+            <a:schemeClr val="lt1"/>
+          </a:fontRef>
+        </p:style>
+        <p:txBody>
+          <a:bodyPr rtlCol="0" anchor="ctr"/>
+          <a:lstStyle/>
+          <a:p>
+            <a:pPr algn="ctr"/>
+            <a:endParaRPr lang="en-US"/>
+          </a:p>
+        </p:txBody>
+      </p:sp>
+      <p:sp>
+        <p:nvSpPr>
+          <p:cNvPr id="16" name="Cube 15">
+            <a:extLst>
+              <a:ext uri="{FF2B5EF4-FFF2-40B4-BE49-F238E27FC236}">
+                <a16:creationId xmlns:a16="http://schemas.microsoft.com/office/drawing/2014/main" id="{9E34BC89-07B1-46CC-9BEE-EC12627FFC7D}"/>
+              </a:ext>
+            </a:extLst>
+          </p:cNvPr>
+          <p:cNvSpPr/>
+          <p:nvPr/>
+        </p:nvSpPr>
+        <p:spPr>
+          <a:xfrm rot="16200000">
+            <a:off x="9891377" y="2248037"/>
+            <a:ext cx="3251413" cy="703387"/>
+          </a:xfrm>
+          <a:prstGeom prst="cube">
+            <a:avLst>
+              <a:gd name="adj" fmla="val 74519"/>
+            </a:avLst>
+          </a:prstGeom>
+          <a:solidFill>
+            <a:srgbClr val="C00000">
+              <a:alpha val="39000"/>
+            </a:srgbClr>
+          </a:solidFill>
+        </p:spPr>
+        <p:style>
+          <a:lnRef idx="2">
+            <a:schemeClr val="accent1">
+              <a:shade val="15000"/>
+            </a:schemeClr>
+          </a:lnRef>
+          <a:fillRef idx="1">
+            <a:schemeClr val="accent1"/>
+          </a:fillRef>
+          <a:effectRef idx="0">
+            <a:schemeClr val="accent1"/>
+          </a:effectRef>
+          <a:fontRef idx="minor">
+            <a:schemeClr val="lt1"/>
+          </a:fontRef>
+        </p:style>
+        <p:txBody>
+          <a:bodyPr rtlCol="0" anchor="ctr"/>
+          <a:lstStyle/>
+          <a:p>
+            <a:pPr algn="ctr"/>
+            <a:endParaRPr lang="en-US"/>
+          </a:p>
+        </p:txBody>
+      </p:sp>
+      <p:cxnSp>
+        <p:nvCxnSpPr>
+          <p:cNvPr id="18" name="Straight Arrow Connector 17">
+            <a:extLst>
+              <a:ext uri="{FF2B5EF4-FFF2-40B4-BE49-F238E27FC236}">
+                <a16:creationId xmlns:a16="http://schemas.microsoft.com/office/drawing/2014/main" id="{D09DAFB4-3DBB-2FB9-4E95-65718083C4CA}"/>
+              </a:ext>
+            </a:extLst>
+          </p:cNvPr>
+          <p:cNvCxnSpPr>
+            <a:cxnSpLocks/>
+          </p:cNvCxnSpPr>
+          <p:nvPr/>
+        </p:nvCxnSpPr>
+        <p:spPr>
+          <a:xfrm>
+            <a:off x="3108960" y="2742968"/>
+            <a:ext cx="273661" cy="0"/>
+          </a:xfrm>
+          <a:prstGeom prst="straightConnector1">
+            <a:avLst/>
+          </a:prstGeom>
+          <a:ln w="50800">
+            <a:tailEnd type="triangle"/>
+          </a:ln>
+        </p:spPr>
+        <p:style>
+          <a:lnRef idx="2">
+            <a:schemeClr val="accent1"/>
+          </a:lnRef>
+          <a:fillRef idx="0">
+            <a:schemeClr val="accent1"/>
+          </a:fillRef>
+          <a:effectRef idx="1">
+            <a:schemeClr val="accent1"/>
+          </a:effectRef>
+          <a:fontRef idx="minor">
+            <a:schemeClr val="tx1"/>
+          </a:fontRef>
+        </p:style>
+      </p:cxnSp>
+      <p:cxnSp>
+        <p:nvCxnSpPr>
+          <p:cNvPr id="25" name="Straight Arrow Connector 24">
+            <a:extLst>
+              <a:ext uri="{FF2B5EF4-FFF2-40B4-BE49-F238E27FC236}">
+                <a16:creationId xmlns:a16="http://schemas.microsoft.com/office/drawing/2014/main" id="{72DF2805-8CAD-BD60-1F01-4BCA4ADAA170}"/>
+              </a:ext>
+            </a:extLst>
+          </p:cNvPr>
+          <p:cNvCxnSpPr>
+            <a:cxnSpLocks/>
+          </p:cNvCxnSpPr>
+          <p:nvPr/>
+        </p:nvCxnSpPr>
+        <p:spPr>
+          <a:xfrm>
+            <a:off x="4198826" y="2763288"/>
+            <a:ext cx="273661" cy="0"/>
+          </a:xfrm>
+          <a:prstGeom prst="straightConnector1">
+            <a:avLst/>
+          </a:prstGeom>
+          <a:ln w="50800">
+            <a:tailEnd type="triangle"/>
+          </a:ln>
+        </p:spPr>
+        <p:style>
+          <a:lnRef idx="2">
+            <a:schemeClr val="accent1"/>
+          </a:lnRef>
+          <a:fillRef idx="0">
+            <a:schemeClr val="accent1"/>
+          </a:fillRef>
+          <a:effectRef idx="1">
+            <a:schemeClr val="accent1"/>
+          </a:effectRef>
+          <a:fontRef idx="minor">
+            <a:schemeClr val="tx1"/>
+          </a:fontRef>
+        </p:style>
+      </p:cxnSp>
+      <p:cxnSp>
+        <p:nvCxnSpPr>
+          <p:cNvPr id="26" name="Straight Arrow Connector 25">
+            <a:extLst>
+              <a:ext uri="{FF2B5EF4-FFF2-40B4-BE49-F238E27FC236}">
+                <a16:creationId xmlns:a16="http://schemas.microsoft.com/office/drawing/2014/main" id="{6C991765-01C0-BA76-B52A-56D9D4857391}"/>
+              </a:ext>
+            </a:extLst>
+          </p:cNvPr>
+          <p:cNvCxnSpPr>
+            <a:cxnSpLocks/>
+          </p:cNvCxnSpPr>
+          <p:nvPr/>
+        </p:nvCxnSpPr>
+        <p:spPr>
+          <a:xfrm>
+            <a:off x="5315037" y="2742736"/>
+            <a:ext cx="273661" cy="0"/>
+          </a:xfrm>
+          <a:prstGeom prst="straightConnector1">
+            <a:avLst/>
+          </a:prstGeom>
+          <a:ln w="50800">
+            <a:tailEnd type="triangle"/>
+          </a:ln>
+        </p:spPr>
+        <p:style>
+          <a:lnRef idx="2">
+            <a:schemeClr val="accent1"/>
+          </a:lnRef>
+          <a:fillRef idx="0">
+            <a:schemeClr val="accent1"/>
+          </a:fillRef>
+          <a:effectRef idx="1">
+            <a:schemeClr val="accent1"/>
+          </a:effectRef>
+          <a:fontRef idx="minor">
+            <a:schemeClr val="tx1"/>
+          </a:fontRef>
+        </p:style>
+      </p:cxnSp>
+      <p:cxnSp>
+        <p:nvCxnSpPr>
+          <p:cNvPr id="27" name="Straight Arrow Connector 26">
+            <a:extLst>
+              <a:ext uri="{FF2B5EF4-FFF2-40B4-BE49-F238E27FC236}">
+                <a16:creationId xmlns:a16="http://schemas.microsoft.com/office/drawing/2014/main" id="{7C49A4A9-C133-58DE-38D5-520A7C98ABF2}"/>
+              </a:ext>
+            </a:extLst>
+          </p:cNvPr>
+          <p:cNvCxnSpPr>
+            <a:cxnSpLocks/>
+          </p:cNvCxnSpPr>
+          <p:nvPr/>
+        </p:nvCxnSpPr>
+        <p:spPr>
+          <a:xfrm>
+            <a:off x="9885431" y="2741808"/>
+            <a:ext cx="273661" cy="0"/>
+          </a:xfrm>
+          <a:prstGeom prst="straightConnector1">
+            <a:avLst/>
+          </a:prstGeom>
+          <a:ln w="50800">
+            <a:tailEnd type="triangle"/>
+          </a:ln>
+        </p:spPr>
+        <p:style>
+          <a:lnRef idx="2">
+            <a:schemeClr val="accent1"/>
+          </a:lnRef>
+          <a:fillRef idx="0">
+            <a:schemeClr val="accent1"/>
+          </a:fillRef>
+          <a:effectRef idx="1">
+            <a:schemeClr val="accent1"/>
+          </a:effectRef>
+          <a:fontRef idx="minor">
+            <a:schemeClr val="tx1"/>
+          </a:fontRef>
+        </p:style>
+      </p:cxnSp>
+      <p:cxnSp>
+        <p:nvCxnSpPr>
+          <p:cNvPr id="28" name="Straight Arrow Connector 27">
+            <a:extLst>
+              <a:ext uri="{FF2B5EF4-FFF2-40B4-BE49-F238E27FC236}">
+                <a16:creationId xmlns:a16="http://schemas.microsoft.com/office/drawing/2014/main" id="{16857CA2-6C72-810B-4AB3-58B2D44023EC}"/>
+              </a:ext>
+            </a:extLst>
+          </p:cNvPr>
+          <p:cNvCxnSpPr>
+            <a:cxnSpLocks/>
+          </p:cNvCxnSpPr>
+          <p:nvPr/>
+        </p:nvCxnSpPr>
+        <p:spPr>
+          <a:xfrm>
+            <a:off x="10974812" y="2763288"/>
+            <a:ext cx="273661" cy="0"/>
+          </a:xfrm>
+          <a:prstGeom prst="straightConnector1">
+            <a:avLst/>
+          </a:prstGeom>
+          <a:ln w="50800">
+            <a:tailEnd type="triangle"/>
+          </a:ln>
+        </p:spPr>
+        <p:style>
+          <a:lnRef idx="2">
+            <a:schemeClr val="accent1"/>
+          </a:lnRef>
+          <a:fillRef idx="0">
+            <a:schemeClr val="accent1"/>
+          </a:fillRef>
+          <a:effectRef idx="1">
+            <a:schemeClr val="accent1"/>
+          </a:effectRef>
+          <a:fontRef idx="minor">
+            <a:schemeClr val="tx1"/>
+          </a:fontRef>
+        </p:style>
+      </p:cxnSp>
+      <p:cxnSp>
+        <p:nvCxnSpPr>
+          <p:cNvPr id="29" name="Straight Arrow Connector 28">
+            <a:extLst>
+              <a:ext uri="{FF2B5EF4-FFF2-40B4-BE49-F238E27FC236}">
+                <a16:creationId xmlns:a16="http://schemas.microsoft.com/office/drawing/2014/main" id="{1AB8C5DB-8240-6F7F-7C00-DA3EB9CD841D}"/>
+              </a:ext>
+            </a:extLst>
+          </p:cNvPr>
+          <p:cNvCxnSpPr>
+            <a:cxnSpLocks/>
+            <a:stCxn id="11" idx="2"/>
+          </p:cNvCxnSpPr>
+          <p:nvPr/>
+        </p:nvCxnSpPr>
+        <p:spPr>
+          <a:xfrm>
+            <a:off x="7698975" y="4205556"/>
+            <a:ext cx="162963" cy="312964"/>
+          </a:xfrm>
+          <a:prstGeom prst="straightConnector1">
+            <a:avLst/>
+          </a:prstGeom>
+          <a:ln w="15875">
+            <a:solidFill>
+              <a:schemeClr val="tx1"/>
+            </a:solidFill>
+            <a:prstDash val="dash"/>
+            <a:tailEnd type="triangle"/>
+          </a:ln>
+        </p:spPr>
+        <p:style>
+          <a:lnRef idx="2">
+            <a:schemeClr val="accent1"/>
+          </a:lnRef>
+          <a:fillRef idx="0">
+            <a:schemeClr val="accent1"/>
+          </a:fillRef>
+          <a:effectRef idx="1">
+            <a:schemeClr val="accent1"/>
+          </a:effectRef>
+          <a:fontRef idx="minor">
+            <a:schemeClr val="tx1"/>
+          </a:fontRef>
+        </p:style>
+      </p:cxnSp>
+      <p:sp>
+        <p:nvSpPr>
+          <p:cNvPr id="32" name="TextBox 31">
+            <a:extLst>
+              <a:ext uri="{FF2B5EF4-FFF2-40B4-BE49-F238E27FC236}">
+                <a16:creationId xmlns:a16="http://schemas.microsoft.com/office/drawing/2014/main" id="{8C99CD21-5893-7D3A-BEBB-0816C564C457}"/>
               </a:ext>
             </a:extLst>
           </p:cNvPr>
@@ -7373,39 +8605,79 @@
         </p:nvSpPr>
         <p:spPr>
           <a:xfrm>
-            <a:off x="2141113" y="3295472"/>
-            <a:ext cx="7690165" cy="369332"/>
+            <a:off x="5315037" y="4687744"/>
+            <a:ext cx="1059545" cy="338554"/>
           </a:xfrm>
           <a:prstGeom prst="rect">
             <a:avLst/>
           </a:prstGeom>
           <a:noFill/>
-        </p:spPr>
-        <p:txBody>
-          <a:bodyPr wrap="square">
+          <a:ln>
+            <a:solidFill>
+              <a:schemeClr val="tx1"/>
+            </a:solidFill>
+          </a:ln>
+        </p:spPr>
+        <p:txBody>
+          <a:bodyPr wrap="square" rtlCol="0">
             <a:spAutoFit/>
           </a:bodyPr>
           <a:lstStyle/>
           <a:p>
             <a:r>
-              <a:rPr lang="en-US">
-                <a:hlinkClick r:id="rId4"/>
-              </a:rPr>
-              <a:t>https://www.nature.com/articles/sdata2018161</a:t>
-            </a:r>
-            <a:r>
-              <a:rPr lang="en-US"/>
-              <a:t> (bài báo về dataset)</a:t>
-            </a:r>
-          </a:p>
-        </p:txBody>
-      </p:sp>
-      <p:sp>
-        <p:nvSpPr>
-          <p:cNvPr id="18" name="TextBox 17">
-            <a:extLst>
-              <a:ext uri="{FF2B5EF4-FFF2-40B4-BE49-F238E27FC236}">
-                <a16:creationId xmlns:a16="http://schemas.microsoft.com/office/drawing/2014/main" id="{B644078B-CD83-16E6-F651-912129CA9F88}"/>
+              <a:rPr lang="en-US" sz="800" b="1"/>
+              <a:t>12x Transformer Encoder Blocks</a:t>
+            </a:r>
+          </a:p>
+        </p:txBody>
+      </p:sp>
+      <p:cxnSp>
+        <p:nvCxnSpPr>
+          <p:cNvPr id="33" name="Straight Arrow Connector 32">
+            <a:extLst>
+              <a:ext uri="{FF2B5EF4-FFF2-40B4-BE49-F238E27FC236}">
+                <a16:creationId xmlns:a16="http://schemas.microsoft.com/office/drawing/2014/main" id="{A43A214D-F1E2-7B84-B724-70FCCE5DF595}"/>
+              </a:ext>
+            </a:extLst>
+          </p:cNvPr>
+          <p:cNvCxnSpPr>
+            <a:cxnSpLocks/>
+          </p:cNvCxnSpPr>
+          <p:nvPr/>
+        </p:nvCxnSpPr>
+        <p:spPr>
+          <a:xfrm>
+            <a:off x="1881586" y="2741807"/>
+            <a:ext cx="273661" cy="0"/>
+          </a:xfrm>
+          <a:prstGeom prst="straightConnector1">
+            <a:avLst/>
+          </a:prstGeom>
+          <a:ln w="50800">
+            <a:tailEnd type="triangle"/>
+          </a:ln>
+        </p:spPr>
+        <p:style>
+          <a:lnRef idx="2">
+            <a:schemeClr val="accent1"/>
+          </a:lnRef>
+          <a:fillRef idx="0">
+            <a:schemeClr val="accent1"/>
+          </a:fillRef>
+          <a:effectRef idx="1">
+            <a:schemeClr val="accent1"/>
+          </a:effectRef>
+          <a:fontRef idx="minor">
+            <a:schemeClr val="tx1"/>
+          </a:fontRef>
+        </p:style>
+      </p:cxnSp>
+      <p:sp>
+        <p:nvSpPr>
+          <p:cNvPr id="35" name="TextBox 34">
+            <a:extLst>
+              <a:ext uri="{FF2B5EF4-FFF2-40B4-BE49-F238E27FC236}">
+                <a16:creationId xmlns:a16="http://schemas.microsoft.com/office/drawing/2014/main" id="{53C6C48C-639F-6713-13DE-34ABF1BA1ACA}"/>
               </a:ext>
             </a:extLst>
           </p:cNvPr>
@@ -7414,39 +8686,141 @@
         </p:nvSpPr>
         <p:spPr>
           <a:xfrm>
-            <a:off x="2141113" y="3933196"/>
-            <a:ext cx="7416480" cy="923330"/>
+            <a:off x="3612530" y="4395410"/>
+            <a:ext cx="1609396" cy="584775"/>
           </a:xfrm>
           <a:prstGeom prst="rect">
             <a:avLst/>
           </a:prstGeom>
           <a:noFill/>
-        </p:spPr>
-        <p:txBody>
-          <a:bodyPr wrap="square">
+          <a:ln>
+            <a:solidFill>
+              <a:schemeClr val="tx1"/>
+            </a:solidFill>
+          </a:ln>
+        </p:spPr>
+        <p:txBody>
+          <a:bodyPr wrap="square" rtlCol="0">
             <a:spAutoFit/>
           </a:bodyPr>
           <a:lstStyle/>
           <a:p>
             <a:r>
-              <a:rPr lang="en-US">
-                <a:hlinkClick r:id="rId5"/>
-              </a:rPr>
-              <a:t>https://www.researchgate.net/publication/384018286_Comprehensive_comparison_between_vision_transformers_and_convolutional_neural_networks_for_face_recognition_tasks</a:t>
-            </a:r>
-            <a:r>
-              <a:rPr lang="en-US"/>
-              <a:t> (so sánh CNN, ViT)</a:t>
-            </a:r>
-          </a:p>
-        </p:txBody>
-      </p:sp>
-      <p:sp>
-        <p:nvSpPr>
-          <p:cNvPr id="19" name="TextBox 18">
-            <a:extLst>
-              <a:ext uri="{FF2B5EF4-FFF2-40B4-BE49-F238E27FC236}">
-                <a16:creationId xmlns:a16="http://schemas.microsoft.com/office/drawing/2014/main" id="{B2337F1D-93B3-3A28-1340-72562765068C}"/>
+              <a:rPr lang="en-US" sz="800" b="1"/>
+              <a:t>Add [CLS] token + Position Embedding</a:t>
+            </a:r>
+          </a:p>
+          <a:p>
+            <a:r>
+              <a:rPr lang="en-US" sz="800"/>
+              <a:t>197 token (1 CLS + 196 Patches)</a:t>
+            </a:r>
+            <a:br>
+              <a:rPr lang="en-US" sz="800"/>
+            </a:br>
+            <a:r>
+              <a:rPr lang="en-US" sz="800"/>
+              <a:t>Shape [197, 768]</a:t>
+            </a:r>
+          </a:p>
+        </p:txBody>
+      </p:sp>
+      <p:cxnSp>
+        <p:nvCxnSpPr>
+          <p:cNvPr id="36" name="Straight Arrow Connector 35">
+            <a:extLst>
+              <a:ext uri="{FF2B5EF4-FFF2-40B4-BE49-F238E27FC236}">
+                <a16:creationId xmlns:a16="http://schemas.microsoft.com/office/drawing/2014/main" id="{638239E1-D561-EDEC-8C3C-58CD435E5233}"/>
+              </a:ext>
+            </a:extLst>
+          </p:cNvPr>
+          <p:cNvCxnSpPr>
+            <a:cxnSpLocks/>
+          </p:cNvCxnSpPr>
+          <p:nvPr/>
+        </p:nvCxnSpPr>
+        <p:spPr>
+          <a:xfrm flipH="1">
+            <a:off x="1445278" y="3767662"/>
+            <a:ext cx="820801" cy="403366"/>
+          </a:xfrm>
+          <a:prstGeom prst="straightConnector1">
+            <a:avLst/>
+          </a:prstGeom>
+          <a:ln w="15875">
+            <a:solidFill>
+              <a:schemeClr val="tx1"/>
+            </a:solidFill>
+            <a:prstDash val="dash"/>
+            <a:tailEnd type="triangle"/>
+          </a:ln>
+        </p:spPr>
+        <p:style>
+          <a:lnRef idx="2">
+            <a:schemeClr val="accent1"/>
+          </a:lnRef>
+          <a:fillRef idx="0">
+            <a:schemeClr val="accent1"/>
+          </a:fillRef>
+          <a:effectRef idx="1">
+            <a:schemeClr val="accent1"/>
+          </a:effectRef>
+          <a:fontRef idx="minor">
+            <a:schemeClr val="tx1"/>
+          </a:fontRef>
+        </p:style>
+      </p:cxnSp>
+      <p:cxnSp>
+        <p:nvCxnSpPr>
+          <p:cNvPr id="39" name="Straight Arrow Connector 38">
+            <a:extLst>
+              <a:ext uri="{FF2B5EF4-FFF2-40B4-BE49-F238E27FC236}">
+                <a16:creationId xmlns:a16="http://schemas.microsoft.com/office/drawing/2014/main" id="{37FB2A81-256C-E498-D73C-77F1CC115431}"/>
+              </a:ext>
+            </a:extLst>
+          </p:cNvPr>
+          <p:cNvCxnSpPr>
+            <a:cxnSpLocks/>
+          </p:cNvCxnSpPr>
+          <p:nvPr/>
+        </p:nvCxnSpPr>
+        <p:spPr>
+          <a:xfrm flipH="1">
+            <a:off x="3356287" y="4021662"/>
+            <a:ext cx="279852" cy="233319"/>
+          </a:xfrm>
+          <a:prstGeom prst="straightConnector1">
+            <a:avLst/>
+          </a:prstGeom>
+          <a:ln w="15875">
+            <a:solidFill>
+              <a:schemeClr val="tx1"/>
+            </a:solidFill>
+            <a:prstDash val="dash"/>
+            <a:tailEnd type="triangle"/>
+          </a:ln>
+        </p:spPr>
+        <p:style>
+          <a:lnRef idx="2">
+            <a:schemeClr val="accent1"/>
+          </a:lnRef>
+          <a:fillRef idx="0">
+            <a:schemeClr val="accent1"/>
+          </a:fillRef>
+          <a:effectRef idx="1">
+            <a:schemeClr val="accent1"/>
+          </a:effectRef>
+          <a:fontRef idx="minor">
+            <a:schemeClr val="tx1"/>
+          </a:fontRef>
+        </p:style>
+      </p:cxnSp>
+      <p:sp>
+        <p:nvSpPr>
+          <p:cNvPr id="41" name="TextBox 40">
+            <a:extLst>
+              <a:ext uri="{FF2B5EF4-FFF2-40B4-BE49-F238E27FC236}">
+                <a16:creationId xmlns:a16="http://schemas.microsoft.com/office/drawing/2014/main" id="{728276D6-E385-EA91-3395-E7B7BE412CF8}"/>
               </a:ext>
             </a:extLst>
           </p:cNvPr>
@@ -7455,13 +8829,1967 @@
         </p:nvSpPr>
         <p:spPr>
           <a:xfrm>
-            <a:off x="404910" y="520861"/>
-            <a:ext cx="2339936" cy="646331"/>
+            <a:off x="1895864" y="4344163"/>
+            <a:ext cx="1618857" cy="584775"/>
           </a:xfrm>
           <a:prstGeom prst="rect">
             <a:avLst/>
           </a:prstGeom>
           <a:noFill/>
+          <a:ln>
+            <a:solidFill>
+              <a:schemeClr val="tx1"/>
+            </a:solidFill>
+          </a:ln>
+        </p:spPr>
+        <p:txBody>
+          <a:bodyPr wrap="square" rtlCol="0">
+            <a:spAutoFit/>
+          </a:bodyPr>
+          <a:lstStyle/>
+          <a:p>
+            <a:r>
+              <a:rPr lang="en-US" sz="800" b="1"/>
+              <a:t>Patch Embedding</a:t>
+            </a:r>
+          </a:p>
+          <a:p>
+            <a:r>
+              <a:rPr lang="en-US" sz="800"/>
+              <a:t>Conv2d(3, 768, kernel = 16, stride = 16</a:t>
+            </a:r>
+          </a:p>
+          <a:p>
+            <a:r>
+              <a:rPr lang="en-US" sz="800"/>
+              <a:t>16 patches (14x14) -&gt; 768 dim</a:t>
+            </a:r>
+          </a:p>
+        </p:txBody>
+      </p:sp>
+      <p:cxnSp>
+        <p:nvCxnSpPr>
+          <p:cNvPr id="42" name="Straight Arrow Connector 41">
+            <a:extLst>
+              <a:ext uri="{FF2B5EF4-FFF2-40B4-BE49-F238E27FC236}">
+                <a16:creationId xmlns:a16="http://schemas.microsoft.com/office/drawing/2014/main" id="{BA1646C9-5843-EA0B-0DA1-84D3454928F6}"/>
+              </a:ext>
+            </a:extLst>
+          </p:cNvPr>
+          <p:cNvCxnSpPr>
+            <a:cxnSpLocks/>
+          </p:cNvCxnSpPr>
+          <p:nvPr/>
+        </p:nvCxnSpPr>
+        <p:spPr>
+          <a:xfrm flipH="1">
+            <a:off x="4417228" y="4054369"/>
+            <a:ext cx="279852" cy="233319"/>
+          </a:xfrm>
+          <a:prstGeom prst="straightConnector1">
+            <a:avLst/>
+          </a:prstGeom>
+          <a:ln w="15875">
+            <a:solidFill>
+              <a:schemeClr val="tx1"/>
+            </a:solidFill>
+            <a:prstDash val="dash"/>
+            <a:tailEnd type="triangle"/>
+          </a:ln>
+        </p:spPr>
+        <p:style>
+          <a:lnRef idx="2">
+            <a:schemeClr val="accent1"/>
+          </a:lnRef>
+          <a:fillRef idx="0">
+            <a:schemeClr val="accent1"/>
+          </a:fillRef>
+          <a:effectRef idx="1">
+            <a:schemeClr val="accent1"/>
+          </a:effectRef>
+          <a:fontRef idx="minor">
+            <a:schemeClr val="tx1"/>
+          </a:fontRef>
+        </p:style>
+      </p:cxnSp>
+      <p:sp>
+        <p:nvSpPr>
+          <p:cNvPr id="44" name="TextBox 43">
+            <a:extLst>
+              <a:ext uri="{FF2B5EF4-FFF2-40B4-BE49-F238E27FC236}">
+                <a16:creationId xmlns:a16="http://schemas.microsoft.com/office/drawing/2014/main" id="{C855E55D-FD28-B577-D0DA-66D11F556266}"/>
+              </a:ext>
+            </a:extLst>
+          </p:cNvPr>
+          <p:cNvSpPr txBox="1"/>
+          <p:nvPr/>
+        </p:nvSpPr>
+        <p:spPr>
+          <a:xfrm>
+            <a:off x="6629488" y="4661503"/>
+            <a:ext cx="689966" cy="215444"/>
+          </a:xfrm>
+          <a:prstGeom prst="rect">
+            <a:avLst/>
+          </a:prstGeom>
+          <a:noFill/>
+          <a:ln>
+            <a:solidFill>
+              <a:schemeClr val="tx1"/>
+            </a:solidFill>
+          </a:ln>
+        </p:spPr>
+        <p:txBody>
+          <a:bodyPr wrap="square" rtlCol="0">
+            <a:spAutoFit/>
+          </a:bodyPr>
+          <a:lstStyle/>
+          <a:p>
+            <a:r>
+              <a:rPr lang="en-US" sz="800"/>
+              <a:t>Layer norm</a:t>
+            </a:r>
+          </a:p>
+        </p:txBody>
+      </p:sp>
+      <p:cxnSp>
+        <p:nvCxnSpPr>
+          <p:cNvPr id="45" name="Straight Arrow Connector 44">
+            <a:extLst>
+              <a:ext uri="{FF2B5EF4-FFF2-40B4-BE49-F238E27FC236}">
+                <a16:creationId xmlns:a16="http://schemas.microsoft.com/office/drawing/2014/main" id="{10A9FE01-CC3F-F223-8046-A71253C72B69}"/>
+              </a:ext>
+            </a:extLst>
+          </p:cNvPr>
+          <p:cNvCxnSpPr>
+            <a:cxnSpLocks/>
+            <a:stCxn id="10" idx="2"/>
+          </p:cNvCxnSpPr>
+          <p:nvPr/>
+        </p:nvCxnSpPr>
+        <p:spPr>
+          <a:xfrm>
+            <a:off x="6595727" y="4205556"/>
+            <a:ext cx="172430" cy="392607"/>
+          </a:xfrm>
+          <a:prstGeom prst="straightConnector1">
+            <a:avLst/>
+          </a:prstGeom>
+          <a:ln w="15875">
+            <a:solidFill>
+              <a:schemeClr val="tx1"/>
+            </a:solidFill>
+            <a:prstDash val="dash"/>
+            <a:tailEnd type="triangle"/>
+          </a:ln>
+        </p:spPr>
+        <p:style>
+          <a:lnRef idx="2">
+            <a:schemeClr val="accent1"/>
+          </a:lnRef>
+          <a:fillRef idx="0">
+            <a:schemeClr val="accent1"/>
+          </a:fillRef>
+          <a:effectRef idx="1">
+            <a:schemeClr val="accent1"/>
+          </a:effectRef>
+          <a:fontRef idx="minor">
+            <a:schemeClr val="tx1"/>
+          </a:fontRef>
+        </p:style>
+      </p:cxnSp>
+      <p:cxnSp>
+        <p:nvCxnSpPr>
+          <p:cNvPr id="47" name="Straight Arrow Connector 46">
+            <a:extLst>
+              <a:ext uri="{FF2B5EF4-FFF2-40B4-BE49-F238E27FC236}">
+                <a16:creationId xmlns:a16="http://schemas.microsoft.com/office/drawing/2014/main" id="{AD6C613C-65F4-C444-A5E1-31D4AB964DD1}"/>
+              </a:ext>
+            </a:extLst>
+          </p:cNvPr>
+          <p:cNvCxnSpPr>
+            <a:cxnSpLocks/>
+          </p:cNvCxnSpPr>
+          <p:nvPr/>
+        </p:nvCxnSpPr>
+        <p:spPr>
+          <a:xfrm>
+            <a:off x="5844809" y="4021662"/>
+            <a:ext cx="63812" cy="607013"/>
+          </a:xfrm>
+          <a:prstGeom prst="straightConnector1">
+            <a:avLst/>
+          </a:prstGeom>
+          <a:ln w="15875">
+            <a:solidFill>
+              <a:schemeClr val="tx1"/>
+            </a:solidFill>
+            <a:prstDash val="dash"/>
+            <a:tailEnd type="triangle"/>
+          </a:ln>
+        </p:spPr>
+        <p:style>
+          <a:lnRef idx="2">
+            <a:schemeClr val="accent1"/>
+          </a:lnRef>
+          <a:fillRef idx="0">
+            <a:schemeClr val="accent1"/>
+          </a:fillRef>
+          <a:effectRef idx="1">
+            <a:schemeClr val="accent1"/>
+          </a:effectRef>
+          <a:fontRef idx="minor">
+            <a:schemeClr val="tx1"/>
+          </a:fontRef>
+        </p:style>
+      </p:cxnSp>
+      <p:sp>
+        <p:nvSpPr>
+          <p:cNvPr id="51" name="TextBox 50">
+            <a:extLst>
+              <a:ext uri="{FF2B5EF4-FFF2-40B4-BE49-F238E27FC236}">
+                <a16:creationId xmlns:a16="http://schemas.microsoft.com/office/drawing/2014/main" id="{0BCDD436-AECA-8C48-38E8-279923B4DA0B}"/>
+              </a:ext>
+            </a:extLst>
+          </p:cNvPr>
+          <p:cNvSpPr txBox="1"/>
+          <p:nvPr/>
+        </p:nvSpPr>
+        <p:spPr>
+          <a:xfrm>
+            <a:off x="7394265" y="4612753"/>
+            <a:ext cx="1004889" cy="584775"/>
+          </a:xfrm>
+          <a:prstGeom prst="rect">
+            <a:avLst/>
+          </a:prstGeom>
+          <a:noFill/>
+          <a:ln>
+            <a:solidFill>
+              <a:schemeClr val="tx1"/>
+            </a:solidFill>
+          </a:ln>
+        </p:spPr>
+        <p:txBody>
+          <a:bodyPr wrap="square" rtlCol="0">
+            <a:spAutoFit/>
+          </a:bodyPr>
+          <a:lstStyle/>
+          <a:p>
+            <a:r>
+              <a:rPr lang="en-US" sz="800" b="1"/>
+              <a:t>Multi-Head Seft attention</a:t>
+            </a:r>
+          </a:p>
+          <a:p>
+            <a:r>
+              <a:rPr lang="en-US" sz="800"/>
+              <a:t>12 heads, dim = 64 per head</a:t>
+            </a:r>
+          </a:p>
+        </p:txBody>
+      </p:sp>
+      <p:sp>
+        <p:nvSpPr>
+          <p:cNvPr id="53" name="TextBox 52">
+            <a:extLst>
+              <a:ext uri="{FF2B5EF4-FFF2-40B4-BE49-F238E27FC236}">
+                <a16:creationId xmlns:a16="http://schemas.microsoft.com/office/drawing/2014/main" id="{1A39C707-AD30-5376-2E5C-BF3D35444BD0}"/>
+              </a:ext>
+            </a:extLst>
+          </p:cNvPr>
+          <p:cNvSpPr txBox="1"/>
+          <p:nvPr/>
+        </p:nvSpPr>
+        <p:spPr>
+          <a:xfrm>
+            <a:off x="8569328" y="4641631"/>
+            <a:ext cx="703386" cy="215444"/>
+          </a:xfrm>
+          <a:prstGeom prst="rect">
+            <a:avLst/>
+          </a:prstGeom>
+          <a:noFill/>
+          <a:ln>
+            <a:solidFill>
+              <a:schemeClr val="tx1"/>
+            </a:solidFill>
+          </a:ln>
+        </p:spPr>
+        <p:txBody>
+          <a:bodyPr wrap="square" rtlCol="0">
+            <a:spAutoFit/>
+          </a:bodyPr>
+          <a:lstStyle/>
+          <a:p>
+            <a:r>
+              <a:rPr lang="en-US" sz="800"/>
+              <a:t>Layer norm</a:t>
+            </a:r>
+          </a:p>
+        </p:txBody>
+      </p:sp>
+      <p:cxnSp>
+        <p:nvCxnSpPr>
+          <p:cNvPr id="54" name="Straight Arrow Connector 53">
+            <a:extLst>
+              <a:ext uri="{FF2B5EF4-FFF2-40B4-BE49-F238E27FC236}">
+                <a16:creationId xmlns:a16="http://schemas.microsoft.com/office/drawing/2014/main" id="{9A0AF933-A2E8-0C44-2F30-06F378508259}"/>
+              </a:ext>
+            </a:extLst>
+          </p:cNvPr>
+          <p:cNvCxnSpPr>
+            <a:cxnSpLocks/>
+          </p:cNvCxnSpPr>
+          <p:nvPr/>
+        </p:nvCxnSpPr>
+        <p:spPr>
+          <a:xfrm>
+            <a:off x="8569328" y="4188836"/>
+            <a:ext cx="228129" cy="369769"/>
+          </a:xfrm>
+          <a:prstGeom prst="straightConnector1">
+            <a:avLst/>
+          </a:prstGeom>
+          <a:ln w="15875">
+            <a:solidFill>
+              <a:schemeClr val="tx1"/>
+            </a:solidFill>
+            <a:prstDash val="dash"/>
+            <a:tailEnd type="triangle"/>
+          </a:ln>
+        </p:spPr>
+        <p:style>
+          <a:lnRef idx="2">
+            <a:schemeClr val="accent1"/>
+          </a:lnRef>
+          <a:fillRef idx="0">
+            <a:schemeClr val="accent1"/>
+          </a:fillRef>
+          <a:effectRef idx="1">
+            <a:schemeClr val="accent1"/>
+          </a:effectRef>
+          <a:fontRef idx="minor">
+            <a:schemeClr val="tx1"/>
+          </a:fontRef>
+        </p:style>
+      </p:cxnSp>
+      <p:sp>
+        <p:nvSpPr>
+          <p:cNvPr id="56" name="TextBox 55">
+            <a:extLst>
+              <a:ext uri="{FF2B5EF4-FFF2-40B4-BE49-F238E27FC236}">
+                <a16:creationId xmlns:a16="http://schemas.microsoft.com/office/drawing/2014/main" id="{F1A7ABA6-FE0C-6515-BFE6-1681826FACC4}"/>
+              </a:ext>
+            </a:extLst>
+          </p:cNvPr>
+          <p:cNvSpPr txBox="1"/>
+          <p:nvPr/>
+        </p:nvSpPr>
+        <p:spPr>
+          <a:xfrm>
+            <a:off x="10343208" y="4540682"/>
+            <a:ext cx="1059545" cy="215444"/>
+          </a:xfrm>
+          <a:prstGeom prst="rect">
+            <a:avLst/>
+          </a:prstGeom>
+          <a:noFill/>
+          <a:ln>
+            <a:solidFill>
+              <a:schemeClr val="tx1"/>
+            </a:solidFill>
+          </a:ln>
+        </p:spPr>
+        <p:txBody>
+          <a:bodyPr wrap="square" rtlCol="0">
+            <a:spAutoFit/>
+          </a:bodyPr>
+          <a:lstStyle/>
+          <a:p>
+            <a:r>
+              <a:rPr lang="en-US" sz="800" b="1"/>
+              <a:t>Layer norm (final)</a:t>
+            </a:r>
+          </a:p>
+        </p:txBody>
+      </p:sp>
+      <p:cxnSp>
+        <p:nvCxnSpPr>
+          <p:cNvPr id="57" name="Straight Arrow Connector 56">
+            <a:extLst>
+              <a:ext uri="{FF2B5EF4-FFF2-40B4-BE49-F238E27FC236}">
+                <a16:creationId xmlns:a16="http://schemas.microsoft.com/office/drawing/2014/main" id="{6C198F83-03D8-3269-9CE7-34E4F082606B}"/>
+              </a:ext>
+            </a:extLst>
+          </p:cNvPr>
+          <p:cNvCxnSpPr>
+            <a:cxnSpLocks/>
+          </p:cNvCxnSpPr>
+          <p:nvPr/>
+        </p:nvCxnSpPr>
+        <p:spPr>
+          <a:xfrm>
+            <a:off x="10827843" y="4188836"/>
+            <a:ext cx="171512" cy="329684"/>
+          </a:xfrm>
+          <a:prstGeom prst="straightConnector1">
+            <a:avLst/>
+          </a:prstGeom>
+          <a:ln w="15875">
+            <a:solidFill>
+              <a:schemeClr val="tx1"/>
+            </a:solidFill>
+            <a:prstDash val="dash"/>
+            <a:tailEnd type="triangle"/>
+          </a:ln>
+        </p:spPr>
+        <p:style>
+          <a:lnRef idx="2">
+            <a:schemeClr val="accent1"/>
+          </a:lnRef>
+          <a:fillRef idx="0">
+            <a:schemeClr val="accent1"/>
+          </a:fillRef>
+          <a:effectRef idx="1">
+            <a:schemeClr val="accent1"/>
+          </a:effectRef>
+          <a:fontRef idx="minor">
+            <a:schemeClr val="tx1"/>
+          </a:fontRef>
+        </p:style>
+      </p:cxnSp>
+      <p:sp>
+        <p:nvSpPr>
+          <p:cNvPr id="60" name="TextBox 59">
+            <a:extLst>
+              <a:ext uri="{FF2B5EF4-FFF2-40B4-BE49-F238E27FC236}">
+                <a16:creationId xmlns:a16="http://schemas.microsoft.com/office/drawing/2014/main" id="{930A395A-2F7B-F11A-7661-E8196E6D208D}"/>
+              </a:ext>
+            </a:extLst>
+          </p:cNvPr>
+          <p:cNvSpPr txBox="1"/>
+          <p:nvPr/>
+        </p:nvSpPr>
+        <p:spPr>
+          <a:xfrm>
+            <a:off x="10590837" y="5140330"/>
+            <a:ext cx="1414662" cy="338554"/>
+          </a:xfrm>
+          <a:prstGeom prst="rect">
+            <a:avLst/>
+          </a:prstGeom>
+          <a:noFill/>
+          <a:ln>
+            <a:solidFill>
+              <a:schemeClr val="tx1"/>
+            </a:solidFill>
+          </a:ln>
+        </p:spPr>
+        <p:txBody>
+          <a:bodyPr wrap="square" rtlCol="0">
+            <a:spAutoFit/>
+          </a:bodyPr>
+          <a:lstStyle/>
+          <a:p>
+            <a:r>
+              <a:rPr lang="en-US" sz="800" b="1"/>
+              <a:t>Classification Head</a:t>
+            </a:r>
+          </a:p>
+          <a:p>
+            <a:r>
+              <a:rPr lang="en-US" sz="800"/>
+              <a:t>Linear: 768 -&gt; num_classes</a:t>
+            </a:r>
+          </a:p>
+        </p:txBody>
+      </p:sp>
+      <p:cxnSp>
+        <p:nvCxnSpPr>
+          <p:cNvPr id="61" name="Straight Arrow Connector 60">
+            <a:extLst>
+              <a:ext uri="{FF2B5EF4-FFF2-40B4-BE49-F238E27FC236}">
+                <a16:creationId xmlns:a16="http://schemas.microsoft.com/office/drawing/2014/main" id="{44E66707-C676-EA04-203A-530E8CBC272F}"/>
+              </a:ext>
+            </a:extLst>
+          </p:cNvPr>
+          <p:cNvCxnSpPr>
+            <a:cxnSpLocks/>
+          </p:cNvCxnSpPr>
+          <p:nvPr/>
+        </p:nvCxnSpPr>
+        <p:spPr>
+          <a:xfrm flipH="1">
+            <a:off x="11607397" y="4264695"/>
+            <a:ext cx="107133" cy="761603"/>
+          </a:xfrm>
+          <a:prstGeom prst="straightConnector1">
+            <a:avLst/>
+          </a:prstGeom>
+          <a:ln w="15875">
+            <a:solidFill>
+              <a:schemeClr val="tx1"/>
+            </a:solidFill>
+            <a:prstDash val="dash"/>
+            <a:tailEnd type="triangle"/>
+          </a:ln>
+        </p:spPr>
+        <p:style>
+          <a:lnRef idx="2">
+            <a:schemeClr val="accent1"/>
+          </a:lnRef>
+          <a:fillRef idx="0">
+            <a:schemeClr val="accent1"/>
+          </a:fillRef>
+          <a:effectRef idx="1">
+            <a:schemeClr val="accent1"/>
+          </a:effectRef>
+          <a:fontRef idx="minor">
+            <a:schemeClr val="tx1"/>
+          </a:fontRef>
+        </p:style>
+      </p:cxnSp>
+      <p:cxnSp>
+        <p:nvCxnSpPr>
+          <p:cNvPr id="63" name="Straight Arrow Connector 62">
+            <a:extLst>
+              <a:ext uri="{FF2B5EF4-FFF2-40B4-BE49-F238E27FC236}">
+                <a16:creationId xmlns:a16="http://schemas.microsoft.com/office/drawing/2014/main" id="{E8504017-BAF3-6B54-74F8-81D98D1B7BEE}"/>
+              </a:ext>
+            </a:extLst>
+          </p:cNvPr>
+          <p:cNvCxnSpPr>
+            <a:cxnSpLocks/>
+          </p:cNvCxnSpPr>
+          <p:nvPr/>
+        </p:nvCxnSpPr>
+        <p:spPr>
+          <a:xfrm>
+            <a:off x="9469648" y="4311773"/>
+            <a:ext cx="0" cy="565174"/>
+          </a:xfrm>
+          <a:prstGeom prst="straightConnector1">
+            <a:avLst/>
+          </a:prstGeom>
+          <a:ln w="15875">
+            <a:solidFill>
+              <a:schemeClr val="tx1"/>
+            </a:solidFill>
+            <a:prstDash val="dash"/>
+            <a:tailEnd type="triangle"/>
+          </a:ln>
+        </p:spPr>
+        <p:style>
+          <a:lnRef idx="2">
+            <a:schemeClr val="accent1"/>
+          </a:lnRef>
+          <a:fillRef idx="0">
+            <a:schemeClr val="accent1"/>
+          </a:fillRef>
+          <a:effectRef idx="1">
+            <a:schemeClr val="accent1"/>
+          </a:effectRef>
+          <a:fontRef idx="minor">
+            <a:schemeClr val="tx1"/>
+          </a:fontRef>
+        </p:style>
+      </p:cxnSp>
+      <p:sp>
+        <p:nvSpPr>
+          <p:cNvPr id="65" name="TextBox 64">
+            <a:extLst>
+              <a:ext uri="{FF2B5EF4-FFF2-40B4-BE49-F238E27FC236}">
+                <a16:creationId xmlns:a16="http://schemas.microsoft.com/office/drawing/2014/main" id="{0101D548-CD6A-C921-496C-89B64C51C185}"/>
+              </a:ext>
+            </a:extLst>
+          </p:cNvPr>
+          <p:cNvSpPr txBox="1"/>
+          <p:nvPr/>
+        </p:nvSpPr>
+        <p:spPr>
+          <a:xfrm>
+            <a:off x="8860461" y="4980185"/>
+            <a:ext cx="1414662" cy="338554"/>
+          </a:xfrm>
+          <a:prstGeom prst="rect">
+            <a:avLst/>
+          </a:prstGeom>
+          <a:noFill/>
+          <a:ln>
+            <a:solidFill>
+              <a:schemeClr val="tx1"/>
+            </a:solidFill>
+          </a:ln>
+        </p:spPr>
+        <p:txBody>
+          <a:bodyPr wrap="square" rtlCol="0">
+            <a:spAutoFit/>
+          </a:bodyPr>
+          <a:lstStyle/>
+          <a:p>
+            <a:r>
+              <a:rPr lang="en-US" sz="800" b="1"/>
+              <a:t>MLP ( Feed forward)</a:t>
+            </a:r>
+          </a:p>
+          <a:p>
+            <a:r>
+              <a:rPr lang="en-US" sz="800"/>
+              <a:t>768 -&gt; 3072 -&gt; 768 (GELU)</a:t>
+            </a:r>
+          </a:p>
+        </p:txBody>
+      </p:sp>
+      <p:sp>
+        <p:nvSpPr>
+          <p:cNvPr id="66" name="TextBox 65">
+            <a:extLst>
+              <a:ext uri="{FF2B5EF4-FFF2-40B4-BE49-F238E27FC236}">
+                <a16:creationId xmlns:a16="http://schemas.microsoft.com/office/drawing/2014/main" id="{20E8B77C-B59D-89F7-2AF7-A6B3702BD62E}"/>
+              </a:ext>
+            </a:extLst>
+          </p:cNvPr>
+          <p:cNvSpPr txBox="1"/>
+          <p:nvPr/>
+        </p:nvSpPr>
+        <p:spPr>
+          <a:xfrm>
+            <a:off x="305958" y="330958"/>
+            <a:ext cx="1693028" cy="1384995"/>
+          </a:xfrm>
+          <a:prstGeom prst="rect">
+            <a:avLst/>
+          </a:prstGeom>
+          <a:noFill/>
+          <a:ln>
+            <a:solidFill>
+              <a:schemeClr val="tx1"/>
+            </a:solidFill>
+          </a:ln>
+        </p:spPr>
+        <p:txBody>
+          <a:bodyPr wrap="square" rtlCol="0">
+            <a:spAutoFit/>
+          </a:bodyPr>
+          <a:lstStyle/>
+          <a:p>
+            <a:r>
+              <a:rPr lang="en-US" sz="1200" b="1"/>
+              <a:t>Thông số:</a:t>
+            </a:r>
+          </a:p>
+          <a:p>
+            <a:r>
+              <a:rPr lang="en-US" sz="1200"/>
+              <a:t>Layer: 12</a:t>
+            </a:r>
+          </a:p>
+          <a:p>
+            <a:r>
+              <a:rPr lang="en-US" sz="1200"/>
+              <a:t>Hidden dim: 768</a:t>
+            </a:r>
+          </a:p>
+          <a:p>
+            <a:r>
+              <a:rPr lang="en-US" sz="1200"/>
+              <a:t>MLP dim: 3072</a:t>
+            </a:r>
+          </a:p>
+          <a:p>
+            <a:r>
+              <a:rPr lang="en-US" sz="1200"/>
+              <a:t>Heads: 12</a:t>
+            </a:r>
+          </a:p>
+          <a:p>
+            <a:r>
+              <a:rPr lang="en-US" sz="1200"/>
+              <a:t>Params: ~ 86M</a:t>
+            </a:r>
+          </a:p>
+          <a:p>
+            <a:r>
+              <a:rPr lang="en-US" sz="1200"/>
+              <a:t>Ouput: 1000 classes</a:t>
+            </a:r>
+          </a:p>
+        </p:txBody>
+      </p:sp>
+      <p:grpSp>
+        <p:nvGrpSpPr>
+          <p:cNvPr id="71" name="Group 70">
+            <a:extLst>
+              <a:ext uri="{FF2B5EF4-FFF2-40B4-BE49-F238E27FC236}">
+                <a16:creationId xmlns:a16="http://schemas.microsoft.com/office/drawing/2014/main" id="{6BA178E6-1FC1-A4DA-EB31-7023F1C9BE41}"/>
+              </a:ext>
+            </a:extLst>
+          </p:cNvPr>
+          <p:cNvGrpSpPr/>
+          <p:nvPr/>
+        </p:nvGrpSpPr>
+        <p:grpSpPr>
+          <a:xfrm>
+            <a:off x="2155247" y="5064572"/>
+            <a:ext cx="1072938" cy="1028342"/>
+            <a:chOff x="1828724" y="5072747"/>
+            <a:chExt cx="1447629" cy="1394624"/>
+          </a:xfrm>
+        </p:grpSpPr>
+        <p:pic>
+          <p:nvPicPr>
+            <p:cNvPr id="5" name="Picture 2" descr="Most Popular Dog Breeds: America's 50 Favorite Dogs">
+              <a:extLst>
+                <a:ext uri="{FF2B5EF4-FFF2-40B4-BE49-F238E27FC236}">
+                  <a16:creationId xmlns:a16="http://schemas.microsoft.com/office/drawing/2014/main" id="{A1E90A1D-3E67-0399-3FC2-9135ECB9B4FC}"/>
+                </a:ext>
+              </a:extLst>
+            </p:cNvPr>
+            <p:cNvPicPr>
+              <a:picLocks noChangeAspect="1" noChangeArrowheads="1"/>
+            </p:cNvPicPr>
+            <p:nvPr/>
+          </p:nvPicPr>
+          <p:blipFill>
+            <a:blip r:embed="rId2">
+              <a:extLst>
+                <a:ext uri="{28A0092B-C50C-407E-A947-70E740481C1C}">
+                  <a14:useLocalDpi xmlns:a14="http://schemas.microsoft.com/office/drawing/2010/main" val="0"/>
+                </a:ext>
+              </a:extLst>
+            </a:blip>
+            <a:srcRect/>
+            <a:stretch>
+              <a:fillRect/>
+            </a:stretch>
+          </p:blipFill>
+          <p:spPr bwMode="auto">
+            <a:xfrm>
+              <a:off x="1828728" y="5079727"/>
+              <a:ext cx="1447625" cy="1384989"/>
+            </a:xfrm>
+            <a:prstGeom prst="rect">
+              <a:avLst/>
+            </a:prstGeom>
+            <a:ln>
+              <a:noFill/>
+            </a:ln>
+            <a:effectLst>
+              <a:outerShdw blurRad="292100" dist="139700" dir="2700000" algn="tl" rotWithShape="0">
+                <a:srgbClr val="333333">
+                  <a:alpha val="65000"/>
+                </a:srgbClr>
+              </a:outerShdw>
+            </a:effectLst>
+            <a:extLst>
+              <a:ext uri="{909E8E84-426E-40DD-AFC4-6F175D3DCCD1}">
+                <a14:hiddenFill xmlns:a14="http://schemas.microsoft.com/office/drawing/2010/main">
+                  <a:solidFill>
+                    <a:srgbClr val="FFFFFF"/>
+                  </a:solidFill>
+                </a14:hiddenFill>
+              </a:ext>
+            </a:extLst>
+          </p:spPr>
+        </p:pic>
+        <p:cxnSp>
+          <p:nvCxnSpPr>
+            <p:cNvPr id="17" name="Straight Connector 16">
+              <a:extLst>
+                <a:ext uri="{FF2B5EF4-FFF2-40B4-BE49-F238E27FC236}">
+                  <a16:creationId xmlns:a16="http://schemas.microsoft.com/office/drawing/2014/main" id="{5EB160CB-E5DD-1667-929B-01EDC5E36248}"/>
+                </a:ext>
+              </a:extLst>
+            </p:cNvPr>
+            <p:cNvCxnSpPr/>
+            <p:nvPr/>
+          </p:nvCxnSpPr>
+          <p:spPr>
+            <a:xfrm>
+              <a:off x="1828728" y="5176635"/>
+              <a:ext cx="1447625" cy="0"/>
+            </a:xfrm>
+            <a:prstGeom prst="line">
+              <a:avLst/>
+            </a:prstGeom>
+            <a:ln w="12700">
+              <a:solidFill>
+                <a:schemeClr val="tx1"/>
+              </a:solidFill>
+            </a:ln>
+          </p:spPr>
+          <p:style>
+            <a:lnRef idx="2">
+              <a:schemeClr val="accent1"/>
+            </a:lnRef>
+            <a:fillRef idx="0">
+              <a:schemeClr val="accent1"/>
+            </a:fillRef>
+            <a:effectRef idx="1">
+              <a:schemeClr val="accent1"/>
+            </a:effectRef>
+            <a:fontRef idx="minor">
+              <a:schemeClr val="tx1"/>
+            </a:fontRef>
+          </p:style>
+        </p:cxnSp>
+        <p:cxnSp>
+          <p:nvCxnSpPr>
+            <p:cNvPr id="19" name="Straight Connector 18">
+              <a:extLst>
+                <a:ext uri="{FF2B5EF4-FFF2-40B4-BE49-F238E27FC236}">
+                  <a16:creationId xmlns:a16="http://schemas.microsoft.com/office/drawing/2014/main" id="{924A1435-FA9D-CD01-3EE6-97D44E76F38E}"/>
+                </a:ext>
+              </a:extLst>
+            </p:cNvPr>
+            <p:cNvCxnSpPr/>
+            <p:nvPr/>
+          </p:nvCxnSpPr>
+          <p:spPr>
+            <a:xfrm>
+              <a:off x="1828728" y="5283315"/>
+              <a:ext cx="1447625" cy="0"/>
+            </a:xfrm>
+            <a:prstGeom prst="line">
+              <a:avLst/>
+            </a:prstGeom>
+            <a:ln w="12700">
+              <a:solidFill>
+                <a:schemeClr val="tx1"/>
+              </a:solidFill>
+            </a:ln>
+          </p:spPr>
+          <p:style>
+            <a:lnRef idx="2">
+              <a:schemeClr val="accent1"/>
+            </a:lnRef>
+            <a:fillRef idx="0">
+              <a:schemeClr val="accent1"/>
+            </a:fillRef>
+            <a:effectRef idx="1">
+              <a:schemeClr val="accent1"/>
+            </a:effectRef>
+            <a:fontRef idx="minor">
+              <a:schemeClr val="tx1"/>
+            </a:fontRef>
+          </p:style>
+        </p:cxnSp>
+        <p:cxnSp>
+          <p:nvCxnSpPr>
+            <p:cNvPr id="20" name="Straight Connector 19">
+              <a:extLst>
+                <a:ext uri="{FF2B5EF4-FFF2-40B4-BE49-F238E27FC236}">
+                  <a16:creationId xmlns:a16="http://schemas.microsoft.com/office/drawing/2014/main" id="{71453E50-92E7-5D70-083A-DA1284F754AD}"/>
+                </a:ext>
+              </a:extLst>
+            </p:cNvPr>
+            <p:cNvCxnSpPr/>
+            <p:nvPr/>
+          </p:nvCxnSpPr>
+          <p:spPr>
+            <a:xfrm>
+              <a:off x="1828728" y="5378669"/>
+              <a:ext cx="1447625" cy="0"/>
+            </a:xfrm>
+            <a:prstGeom prst="line">
+              <a:avLst/>
+            </a:prstGeom>
+            <a:ln w="12700">
+              <a:solidFill>
+                <a:schemeClr val="tx1"/>
+              </a:solidFill>
+            </a:ln>
+          </p:spPr>
+          <p:style>
+            <a:lnRef idx="2">
+              <a:schemeClr val="accent1"/>
+            </a:lnRef>
+            <a:fillRef idx="0">
+              <a:schemeClr val="accent1"/>
+            </a:fillRef>
+            <a:effectRef idx="1">
+              <a:schemeClr val="accent1"/>
+            </a:effectRef>
+            <a:fontRef idx="minor">
+              <a:schemeClr val="tx1"/>
+            </a:fontRef>
+          </p:style>
+        </p:cxnSp>
+        <p:cxnSp>
+          <p:nvCxnSpPr>
+            <p:cNvPr id="21" name="Straight Connector 20">
+              <a:extLst>
+                <a:ext uri="{FF2B5EF4-FFF2-40B4-BE49-F238E27FC236}">
+                  <a16:creationId xmlns:a16="http://schemas.microsoft.com/office/drawing/2014/main" id="{52E1C58D-42C5-9CB8-BA58-AD440AC24828}"/>
+                </a:ext>
+              </a:extLst>
+            </p:cNvPr>
+            <p:cNvCxnSpPr/>
+            <p:nvPr/>
+          </p:nvCxnSpPr>
+          <p:spPr>
+            <a:xfrm>
+              <a:off x="1828727" y="5470005"/>
+              <a:ext cx="1447625" cy="0"/>
+            </a:xfrm>
+            <a:prstGeom prst="line">
+              <a:avLst/>
+            </a:prstGeom>
+            <a:ln w="12700">
+              <a:solidFill>
+                <a:schemeClr val="tx1"/>
+              </a:solidFill>
+            </a:ln>
+          </p:spPr>
+          <p:style>
+            <a:lnRef idx="2">
+              <a:schemeClr val="accent1"/>
+            </a:lnRef>
+            <a:fillRef idx="0">
+              <a:schemeClr val="accent1"/>
+            </a:fillRef>
+            <a:effectRef idx="1">
+              <a:schemeClr val="accent1"/>
+            </a:effectRef>
+            <a:fontRef idx="minor">
+              <a:schemeClr val="tx1"/>
+            </a:fontRef>
+          </p:style>
+        </p:cxnSp>
+        <p:cxnSp>
+          <p:nvCxnSpPr>
+            <p:cNvPr id="22" name="Straight Connector 21">
+              <a:extLst>
+                <a:ext uri="{FF2B5EF4-FFF2-40B4-BE49-F238E27FC236}">
+                  <a16:creationId xmlns:a16="http://schemas.microsoft.com/office/drawing/2014/main" id="{06045CDD-B629-85A5-51CA-0377BB382F53}"/>
+                </a:ext>
+              </a:extLst>
+            </p:cNvPr>
+            <p:cNvCxnSpPr/>
+            <p:nvPr/>
+          </p:nvCxnSpPr>
+          <p:spPr>
+            <a:xfrm>
+              <a:off x="1828727" y="5569065"/>
+              <a:ext cx="1447625" cy="0"/>
+            </a:xfrm>
+            <a:prstGeom prst="line">
+              <a:avLst/>
+            </a:prstGeom>
+            <a:ln w="12700">
+              <a:solidFill>
+                <a:schemeClr val="tx1"/>
+              </a:solidFill>
+            </a:ln>
+          </p:spPr>
+          <p:style>
+            <a:lnRef idx="2">
+              <a:schemeClr val="accent1"/>
+            </a:lnRef>
+            <a:fillRef idx="0">
+              <a:schemeClr val="accent1"/>
+            </a:fillRef>
+            <a:effectRef idx="1">
+              <a:schemeClr val="accent1"/>
+            </a:effectRef>
+            <a:fontRef idx="minor">
+              <a:schemeClr val="tx1"/>
+            </a:fontRef>
+          </p:style>
+        </p:cxnSp>
+        <p:cxnSp>
+          <p:nvCxnSpPr>
+            <p:cNvPr id="23" name="Straight Connector 22">
+              <a:extLst>
+                <a:ext uri="{FF2B5EF4-FFF2-40B4-BE49-F238E27FC236}">
+                  <a16:creationId xmlns:a16="http://schemas.microsoft.com/office/drawing/2014/main" id="{C5D05390-607D-7E61-680B-A8702A9FC7AF}"/>
+                </a:ext>
+              </a:extLst>
+            </p:cNvPr>
+            <p:cNvCxnSpPr/>
+            <p:nvPr/>
+          </p:nvCxnSpPr>
+          <p:spPr>
+            <a:xfrm>
+              <a:off x="1828727" y="5671935"/>
+              <a:ext cx="1447625" cy="0"/>
+            </a:xfrm>
+            <a:prstGeom prst="line">
+              <a:avLst/>
+            </a:prstGeom>
+            <a:ln w="12700">
+              <a:solidFill>
+                <a:schemeClr val="tx1"/>
+              </a:solidFill>
+            </a:ln>
+          </p:spPr>
+          <p:style>
+            <a:lnRef idx="2">
+              <a:schemeClr val="accent1"/>
+            </a:lnRef>
+            <a:fillRef idx="0">
+              <a:schemeClr val="accent1"/>
+            </a:fillRef>
+            <a:effectRef idx="1">
+              <a:schemeClr val="accent1"/>
+            </a:effectRef>
+            <a:fontRef idx="minor">
+              <a:schemeClr val="tx1"/>
+            </a:fontRef>
+          </p:style>
+        </p:cxnSp>
+        <p:cxnSp>
+          <p:nvCxnSpPr>
+            <p:cNvPr id="24" name="Straight Connector 23">
+              <a:extLst>
+                <a:ext uri="{FF2B5EF4-FFF2-40B4-BE49-F238E27FC236}">
+                  <a16:creationId xmlns:a16="http://schemas.microsoft.com/office/drawing/2014/main" id="{99ACA720-E537-1B66-A971-5BB328695A2F}"/>
+                </a:ext>
+              </a:extLst>
+            </p:cNvPr>
+            <p:cNvCxnSpPr/>
+            <p:nvPr/>
+          </p:nvCxnSpPr>
+          <p:spPr>
+            <a:xfrm>
+              <a:off x="1828727" y="5772221"/>
+              <a:ext cx="1447625" cy="0"/>
+            </a:xfrm>
+            <a:prstGeom prst="line">
+              <a:avLst/>
+            </a:prstGeom>
+            <a:ln w="12700">
+              <a:solidFill>
+                <a:schemeClr val="tx1"/>
+              </a:solidFill>
+            </a:ln>
+          </p:spPr>
+          <p:style>
+            <a:lnRef idx="2">
+              <a:schemeClr val="accent1"/>
+            </a:lnRef>
+            <a:fillRef idx="0">
+              <a:schemeClr val="accent1"/>
+            </a:fillRef>
+            <a:effectRef idx="1">
+              <a:schemeClr val="accent1"/>
+            </a:effectRef>
+            <a:fontRef idx="minor">
+              <a:schemeClr val="tx1"/>
+            </a:fontRef>
+          </p:style>
+        </p:cxnSp>
+        <p:cxnSp>
+          <p:nvCxnSpPr>
+            <p:cNvPr id="30" name="Straight Connector 29">
+              <a:extLst>
+                <a:ext uri="{FF2B5EF4-FFF2-40B4-BE49-F238E27FC236}">
+                  <a16:creationId xmlns:a16="http://schemas.microsoft.com/office/drawing/2014/main" id="{C697100E-1E33-D232-3358-C4281711F1C8}"/>
+                </a:ext>
+              </a:extLst>
+            </p:cNvPr>
+            <p:cNvCxnSpPr/>
+            <p:nvPr/>
+          </p:nvCxnSpPr>
+          <p:spPr>
+            <a:xfrm>
+              <a:off x="1828727" y="5873865"/>
+              <a:ext cx="1447625" cy="0"/>
+            </a:xfrm>
+            <a:prstGeom prst="line">
+              <a:avLst/>
+            </a:prstGeom>
+            <a:ln w="12700">
+              <a:solidFill>
+                <a:schemeClr val="tx1"/>
+              </a:solidFill>
+            </a:ln>
+          </p:spPr>
+          <p:style>
+            <a:lnRef idx="2">
+              <a:schemeClr val="accent1"/>
+            </a:lnRef>
+            <a:fillRef idx="0">
+              <a:schemeClr val="accent1"/>
+            </a:fillRef>
+            <a:effectRef idx="1">
+              <a:schemeClr val="accent1"/>
+            </a:effectRef>
+            <a:fontRef idx="minor">
+              <a:schemeClr val="tx1"/>
+            </a:fontRef>
+          </p:style>
+        </p:cxnSp>
+        <p:cxnSp>
+          <p:nvCxnSpPr>
+            <p:cNvPr id="31" name="Straight Connector 30">
+              <a:extLst>
+                <a:ext uri="{FF2B5EF4-FFF2-40B4-BE49-F238E27FC236}">
+                  <a16:creationId xmlns:a16="http://schemas.microsoft.com/office/drawing/2014/main" id="{13EA9F9D-6D10-016D-473D-7ED5D7F9CB2D}"/>
+                </a:ext>
+              </a:extLst>
+            </p:cNvPr>
+            <p:cNvCxnSpPr/>
+            <p:nvPr/>
+          </p:nvCxnSpPr>
+          <p:spPr>
+            <a:xfrm>
+              <a:off x="1828727" y="5972925"/>
+              <a:ext cx="1447625" cy="0"/>
+            </a:xfrm>
+            <a:prstGeom prst="line">
+              <a:avLst/>
+            </a:prstGeom>
+            <a:ln w="12700">
+              <a:solidFill>
+                <a:schemeClr val="tx1"/>
+              </a:solidFill>
+            </a:ln>
+          </p:spPr>
+          <p:style>
+            <a:lnRef idx="2">
+              <a:schemeClr val="accent1"/>
+            </a:lnRef>
+            <a:fillRef idx="0">
+              <a:schemeClr val="accent1"/>
+            </a:fillRef>
+            <a:effectRef idx="1">
+              <a:schemeClr val="accent1"/>
+            </a:effectRef>
+            <a:fontRef idx="minor">
+              <a:schemeClr val="tx1"/>
+            </a:fontRef>
+          </p:style>
+        </p:cxnSp>
+        <p:cxnSp>
+          <p:nvCxnSpPr>
+            <p:cNvPr id="34" name="Straight Connector 33">
+              <a:extLst>
+                <a:ext uri="{FF2B5EF4-FFF2-40B4-BE49-F238E27FC236}">
+                  <a16:creationId xmlns:a16="http://schemas.microsoft.com/office/drawing/2014/main" id="{1ABC6194-3134-FA6D-9E9F-60927E7BCC03}"/>
+                </a:ext>
+              </a:extLst>
+            </p:cNvPr>
+            <p:cNvCxnSpPr/>
+            <p:nvPr/>
+          </p:nvCxnSpPr>
+          <p:spPr>
+            <a:xfrm>
+              <a:off x="1828726" y="6083415"/>
+              <a:ext cx="1447625" cy="0"/>
+            </a:xfrm>
+            <a:prstGeom prst="line">
+              <a:avLst/>
+            </a:prstGeom>
+            <a:ln w="12700">
+              <a:solidFill>
+                <a:schemeClr val="tx1"/>
+              </a:solidFill>
+            </a:ln>
+          </p:spPr>
+          <p:style>
+            <a:lnRef idx="2">
+              <a:schemeClr val="accent1"/>
+            </a:lnRef>
+            <a:fillRef idx="0">
+              <a:schemeClr val="accent1"/>
+            </a:fillRef>
+            <a:effectRef idx="1">
+              <a:schemeClr val="accent1"/>
+            </a:effectRef>
+            <a:fontRef idx="minor">
+              <a:schemeClr val="tx1"/>
+            </a:fontRef>
+          </p:style>
+        </p:cxnSp>
+        <p:cxnSp>
+          <p:nvCxnSpPr>
+            <p:cNvPr id="37" name="Straight Connector 36">
+              <a:extLst>
+                <a:ext uri="{FF2B5EF4-FFF2-40B4-BE49-F238E27FC236}">
+                  <a16:creationId xmlns:a16="http://schemas.microsoft.com/office/drawing/2014/main" id="{A1AE3E40-B422-1DB9-911A-0A0E7519B372}"/>
+                </a:ext>
+              </a:extLst>
+            </p:cNvPr>
+            <p:cNvCxnSpPr/>
+            <p:nvPr/>
+          </p:nvCxnSpPr>
+          <p:spPr>
+            <a:xfrm>
+              <a:off x="1828725" y="6193905"/>
+              <a:ext cx="1447625" cy="0"/>
+            </a:xfrm>
+            <a:prstGeom prst="line">
+              <a:avLst/>
+            </a:prstGeom>
+            <a:ln w="12700">
+              <a:solidFill>
+                <a:schemeClr val="tx1"/>
+              </a:solidFill>
+            </a:ln>
+          </p:spPr>
+          <p:style>
+            <a:lnRef idx="2">
+              <a:schemeClr val="accent1"/>
+            </a:lnRef>
+            <a:fillRef idx="0">
+              <a:schemeClr val="accent1"/>
+            </a:fillRef>
+            <a:effectRef idx="1">
+              <a:schemeClr val="accent1"/>
+            </a:effectRef>
+            <a:fontRef idx="minor">
+              <a:schemeClr val="tx1"/>
+            </a:fontRef>
+          </p:style>
+        </p:cxnSp>
+        <p:cxnSp>
+          <p:nvCxnSpPr>
+            <p:cNvPr id="38" name="Straight Connector 37">
+              <a:extLst>
+                <a:ext uri="{FF2B5EF4-FFF2-40B4-BE49-F238E27FC236}">
+                  <a16:creationId xmlns:a16="http://schemas.microsoft.com/office/drawing/2014/main" id="{9840FA70-A9C0-5DC8-5BCD-DBEDE0B22CCF}"/>
+                </a:ext>
+              </a:extLst>
+            </p:cNvPr>
+            <p:cNvCxnSpPr/>
+            <p:nvPr/>
+          </p:nvCxnSpPr>
+          <p:spPr>
+            <a:xfrm>
+              <a:off x="1828725" y="6281535"/>
+              <a:ext cx="1447625" cy="0"/>
+            </a:xfrm>
+            <a:prstGeom prst="line">
+              <a:avLst/>
+            </a:prstGeom>
+            <a:ln w="12700">
+              <a:solidFill>
+                <a:schemeClr val="tx1"/>
+              </a:solidFill>
+            </a:ln>
+          </p:spPr>
+          <p:style>
+            <a:lnRef idx="2">
+              <a:schemeClr val="accent1"/>
+            </a:lnRef>
+            <a:fillRef idx="0">
+              <a:schemeClr val="accent1"/>
+            </a:fillRef>
+            <a:effectRef idx="1">
+              <a:schemeClr val="accent1"/>
+            </a:effectRef>
+            <a:fontRef idx="minor">
+              <a:schemeClr val="tx1"/>
+            </a:fontRef>
+          </p:style>
+        </p:cxnSp>
+        <p:cxnSp>
+          <p:nvCxnSpPr>
+            <p:cNvPr id="40" name="Straight Connector 39">
+              <a:extLst>
+                <a:ext uri="{FF2B5EF4-FFF2-40B4-BE49-F238E27FC236}">
+                  <a16:creationId xmlns:a16="http://schemas.microsoft.com/office/drawing/2014/main" id="{AB029065-07FF-CC94-F999-F2FF0392C0FE}"/>
+                </a:ext>
+              </a:extLst>
+            </p:cNvPr>
+            <p:cNvCxnSpPr/>
+            <p:nvPr/>
+          </p:nvCxnSpPr>
+          <p:spPr>
+            <a:xfrm>
+              <a:off x="1828724" y="6372975"/>
+              <a:ext cx="1447625" cy="0"/>
+            </a:xfrm>
+            <a:prstGeom prst="line">
+              <a:avLst/>
+            </a:prstGeom>
+            <a:ln w="12700">
+              <a:solidFill>
+                <a:schemeClr val="tx1"/>
+              </a:solidFill>
+            </a:ln>
+          </p:spPr>
+          <p:style>
+            <a:lnRef idx="2">
+              <a:schemeClr val="accent1"/>
+            </a:lnRef>
+            <a:fillRef idx="0">
+              <a:schemeClr val="accent1"/>
+            </a:fillRef>
+            <a:effectRef idx="1">
+              <a:schemeClr val="accent1"/>
+            </a:effectRef>
+            <a:fontRef idx="minor">
+              <a:schemeClr val="tx1"/>
+            </a:fontRef>
+          </p:style>
+        </p:cxnSp>
+        <p:cxnSp>
+          <p:nvCxnSpPr>
+            <p:cNvPr id="43" name="Straight Connector 42">
+              <a:extLst>
+                <a:ext uri="{FF2B5EF4-FFF2-40B4-BE49-F238E27FC236}">
+                  <a16:creationId xmlns:a16="http://schemas.microsoft.com/office/drawing/2014/main" id="{D10E66EB-486E-8B14-6024-31949D488A4D}"/>
+                </a:ext>
+              </a:extLst>
+            </p:cNvPr>
+            <p:cNvCxnSpPr>
+              <a:cxnSpLocks/>
+            </p:cNvCxnSpPr>
+            <p:nvPr/>
+          </p:nvCxnSpPr>
+          <p:spPr>
+            <a:xfrm>
+              <a:off x="1934216" y="5079727"/>
+              <a:ext cx="0" cy="1384989"/>
+            </a:xfrm>
+            <a:prstGeom prst="line">
+              <a:avLst/>
+            </a:prstGeom>
+            <a:ln w="12700">
+              <a:solidFill>
+                <a:schemeClr val="tx1"/>
+              </a:solidFill>
+            </a:ln>
+          </p:spPr>
+          <p:style>
+            <a:lnRef idx="2">
+              <a:schemeClr val="accent1"/>
+            </a:lnRef>
+            <a:fillRef idx="0">
+              <a:schemeClr val="accent1"/>
+            </a:fillRef>
+            <a:effectRef idx="1">
+              <a:schemeClr val="accent1"/>
+            </a:effectRef>
+            <a:fontRef idx="minor">
+              <a:schemeClr val="tx1"/>
+            </a:fontRef>
+          </p:style>
+        </p:cxnSp>
+        <p:cxnSp>
+          <p:nvCxnSpPr>
+            <p:cNvPr id="49" name="Straight Connector 48">
+              <a:extLst>
+                <a:ext uri="{FF2B5EF4-FFF2-40B4-BE49-F238E27FC236}">
+                  <a16:creationId xmlns:a16="http://schemas.microsoft.com/office/drawing/2014/main" id="{4F16C648-ED79-FBCF-241D-5120CB8E8F09}"/>
+                </a:ext>
+              </a:extLst>
+            </p:cNvPr>
+            <p:cNvCxnSpPr>
+              <a:cxnSpLocks/>
+            </p:cNvCxnSpPr>
+            <p:nvPr/>
+          </p:nvCxnSpPr>
+          <p:spPr>
+            <a:xfrm>
+              <a:off x="2048516" y="5082382"/>
+              <a:ext cx="0" cy="1384989"/>
+            </a:xfrm>
+            <a:prstGeom prst="line">
+              <a:avLst/>
+            </a:prstGeom>
+            <a:ln w="12700">
+              <a:solidFill>
+                <a:schemeClr val="tx1"/>
+              </a:solidFill>
+            </a:ln>
+          </p:spPr>
+          <p:style>
+            <a:lnRef idx="2">
+              <a:schemeClr val="accent1"/>
+            </a:lnRef>
+            <a:fillRef idx="0">
+              <a:schemeClr val="accent1"/>
+            </a:fillRef>
+            <a:effectRef idx="1">
+              <a:schemeClr val="accent1"/>
+            </a:effectRef>
+            <a:fontRef idx="minor">
+              <a:schemeClr val="tx1"/>
+            </a:fontRef>
+          </p:style>
+        </p:cxnSp>
+        <p:cxnSp>
+          <p:nvCxnSpPr>
+            <p:cNvPr id="50" name="Straight Connector 49">
+              <a:extLst>
+                <a:ext uri="{FF2B5EF4-FFF2-40B4-BE49-F238E27FC236}">
+                  <a16:creationId xmlns:a16="http://schemas.microsoft.com/office/drawing/2014/main" id="{3CEAF232-5833-789E-44DE-D793AC773B17}"/>
+                </a:ext>
+              </a:extLst>
+            </p:cNvPr>
+            <p:cNvCxnSpPr>
+              <a:cxnSpLocks/>
+            </p:cNvCxnSpPr>
+            <p:nvPr/>
+          </p:nvCxnSpPr>
+          <p:spPr>
+            <a:xfrm>
+              <a:off x="2165413" y="5079706"/>
+              <a:ext cx="0" cy="1384989"/>
+            </a:xfrm>
+            <a:prstGeom prst="line">
+              <a:avLst/>
+            </a:prstGeom>
+            <a:ln w="12700">
+              <a:solidFill>
+                <a:schemeClr val="tx1"/>
+              </a:solidFill>
+            </a:ln>
+          </p:spPr>
+          <p:style>
+            <a:lnRef idx="2">
+              <a:schemeClr val="accent1"/>
+            </a:lnRef>
+            <a:fillRef idx="0">
+              <a:schemeClr val="accent1"/>
+            </a:fillRef>
+            <a:effectRef idx="1">
+              <a:schemeClr val="accent1"/>
+            </a:effectRef>
+            <a:fontRef idx="minor">
+              <a:schemeClr val="tx1"/>
+            </a:fontRef>
+          </p:style>
+        </p:cxnSp>
+        <p:cxnSp>
+          <p:nvCxnSpPr>
+            <p:cNvPr id="52" name="Straight Connector 51">
+              <a:extLst>
+                <a:ext uri="{FF2B5EF4-FFF2-40B4-BE49-F238E27FC236}">
+                  <a16:creationId xmlns:a16="http://schemas.microsoft.com/office/drawing/2014/main" id="{B76B96C3-FF1E-45E7-9077-F21D56F17F9D}"/>
+                </a:ext>
+              </a:extLst>
+            </p:cNvPr>
+            <p:cNvCxnSpPr>
+              <a:cxnSpLocks/>
+            </p:cNvCxnSpPr>
+            <p:nvPr/>
+          </p:nvCxnSpPr>
+          <p:spPr>
+            <a:xfrm>
+              <a:off x="2272435" y="5079706"/>
+              <a:ext cx="0" cy="1384989"/>
+            </a:xfrm>
+            <a:prstGeom prst="line">
+              <a:avLst/>
+            </a:prstGeom>
+            <a:ln w="12700">
+              <a:solidFill>
+                <a:schemeClr val="tx1"/>
+              </a:solidFill>
+            </a:ln>
+          </p:spPr>
+          <p:style>
+            <a:lnRef idx="2">
+              <a:schemeClr val="accent1"/>
+            </a:lnRef>
+            <a:fillRef idx="0">
+              <a:schemeClr val="accent1"/>
+            </a:fillRef>
+            <a:effectRef idx="1">
+              <a:schemeClr val="accent1"/>
+            </a:effectRef>
+            <a:fontRef idx="minor">
+              <a:schemeClr val="tx1"/>
+            </a:fontRef>
+          </p:style>
+        </p:cxnSp>
+        <p:cxnSp>
+          <p:nvCxnSpPr>
+            <p:cNvPr id="55" name="Straight Connector 54">
+              <a:extLst>
+                <a:ext uri="{FF2B5EF4-FFF2-40B4-BE49-F238E27FC236}">
+                  <a16:creationId xmlns:a16="http://schemas.microsoft.com/office/drawing/2014/main" id="{396FE532-5EB3-36D6-7B32-6207F1C1E3AC}"/>
+                </a:ext>
+              </a:extLst>
+            </p:cNvPr>
+            <p:cNvCxnSpPr>
+              <a:cxnSpLocks/>
+            </p:cNvCxnSpPr>
+            <p:nvPr/>
+          </p:nvCxnSpPr>
+          <p:spPr>
+            <a:xfrm>
+              <a:off x="2372366" y="5079706"/>
+              <a:ext cx="0" cy="1384989"/>
+            </a:xfrm>
+            <a:prstGeom prst="line">
+              <a:avLst/>
+            </a:prstGeom>
+            <a:ln w="12700">
+              <a:solidFill>
+                <a:schemeClr val="tx1"/>
+              </a:solidFill>
+            </a:ln>
+          </p:spPr>
+          <p:style>
+            <a:lnRef idx="2">
+              <a:schemeClr val="accent1"/>
+            </a:lnRef>
+            <a:fillRef idx="0">
+              <a:schemeClr val="accent1"/>
+            </a:fillRef>
+            <a:effectRef idx="1">
+              <a:schemeClr val="accent1"/>
+            </a:effectRef>
+            <a:fontRef idx="minor">
+              <a:schemeClr val="tx1"/>
+            </a:fontRef>
+          </p:style>
+        </p:cxnSp>
+        <p:cxnSp>
+          <p:nvCxnSpPr>
+            <p:cNvPr id="58" name="Straight Connector 57">
+              <a:extLst>
+                <a:ext uri="{FF2B5EF4-FFF2-40B4-BE49-F238E27FC236}">
+                  <a16:creationId xmlns:a16="http://schemas.microsoft.com/office/drawing/2014/main" id="{6094E420-2709-437D-4FBA-FE4B9D14CA64}"/>
+                </a:ext>
+              </a:extLst>
+            </p:cNvPr>
+            <p:cNvCxnSpPr>
+              <a:cxnSpLocks/>
+            </p:cNvCxnSpPr>
+            <p:nvPr/>
+          </p:nvCxnSpPr>
+          <p:spPr>
+            <a:xfrm>
+              <a:off x="2479046" y="5079706"/>
+              <a:ext cx="0" cy="1384989"/>
+            </a:xfrm>
+            <a:prstGeom prst="line">
+              <a:avLst/>
+            </a:prstGeom>
+            <a:ln w="12700">
+              <a:solidFill>
+                <a:schemeClr val="tx1"/>
+              </a:solidFill>
+            </a:ln>
+          </p:spPr>
+          <p:style>
+            <a:lnRef idx="2">
+              <a:schemeClr val="accent1"/>
+            </a:lnRef>
+            <a:fillRef idx="0">
+              <a:schemeClr val="accent1"/>
+            </a:fillRef>
+            <a:effectRef idx="1">
+              <a:schemeClr val="accent1"/>
+            </a:effectRef>
+            <a:fontRef idx="minor">
+              <a:schemeClr val="tx1"/>
+            </a:fontRef>
+          </p:style>
+        </p:cxnSp>
+        <p:cxnSp>
+          <p:nvCxnSpPr>
+            <p:cNvPr id="59" name="Straight Connector 58">
+              <a:extLst>
+                <a:ext uri="{FF2B5EF4-FFF2-40B4-BE49-F238E27FC236}">
+                  <a16:creationId xmlns:a16="http://schemas.microsoft.com/office/drawing/2014/main" id="{6056C9A5-0EC6-3F75-E4EE-42F9639672E3}"/>
+                </a:ext>
+              </a:extLst>
+            </p:cNvPr>
+            <p:cNvCxnSpPr>
+              <a:cxnSpLocks/>
+            </p:cNvCxnSpPr>
+            <p:nvPr/>
+          </p:nvCxnSpPr>
+          <p:spPr>
+            <a:xfrm>
+              <a:off x="2585726" y="5079726"/>
+              <a:ext cx="0" cy="1384989"/>
+            </a:xfrm>
+            <a:prstGeom prst="line">
+              <a:avLst/>
+            </a:prstGeom>
+            <a:ln w="12700">
+              <a:solidFill>
+                <a:schemeClr val="tx1"/>
+              </a:solidFill>
+            </a:ln>
+          </p:spPr>
+          <p:style>
+            <a:lnRef idx="2">
+              <a:schemeClr val="accent1"/>
+            </a:lnRef>
+            <a:fillRef idx="0">
+              <a:schemeClr val="accent1"/>
+            </a:fillRef>
+            <a:effectRef idx="1">
+              <a:schemeClr val="accent1"/>
+            </a:effectRef>
+            <a:fontRef idx="minor">
+              <a:schemeClr val="tx1"/>
+            </a:fontRef>
+          </p:style>
+        </p:cxnSp>
+        <p:cxnSp>
+          <p:nvCxnSpPr>
+            <p:cNvPr id="62" name="Straight Connector 61">
+              <a:extLst>
+                <a:ext uri="{FF2B5EF4-FFF2-40B4-BE49-F238E27FC236}">
+                  <a16:creationId xmlns:a16="http://schemas.microsoft.com/office/drawing/2014/main" id="{B6D8F433-E3D4-EFC5-460B-712B88EA9C1F}"/>
+                </a:ext>
+              </a:extLst>
+            </p:cNvPr>
+            <p:cNvCxnSpPr>
+              <a:cxnSpLocks/>
+            </p:cNvCxnSpPr>
+            <p:nvPr/>
+          </p:nvCxnSpPr>
+          <p:spPr>
+            <a:xfrm>
+              <a:off x="2684786" y="5079706"/>
+              <a:ext cx="0" cy="1384989"/>
+            </a:xfrm>
+            <a:prstGeom prst="line">
+              <a:avLst/>
+            </a:prstGeom>
+            <a:ln w="12700">
+              <a:solidFill>
+                <a:schemeClr val="tx1"/>
+              </a:solidFill>
+            </a:ln>
+          </p:spPr>
+          <p:style>
+            <a:lnRef idx="2">
+              <a:schemeClr val="accent1"/>
+            </a:lnRef>
+            <a:fillRef idx="0">
+              <a:schemeClr val="accent1"/>
+            </a:fillRef>
+            <a:effectRef idx="1">
+              <a:schemeClr val="accent1"/>
+            </a:effectRef>
+            <a:fontRef idx="minor">
+              <a:schemeClr val="tx1"/>
+            </a:fontRef>
+          </p:style>
+        </p:cxnSp>
+        <p:cxnSp>
+          <p:nvCxnSpPr>
+            <p:cNvPr id="64" name="Straight Connector 63">
+              <a:extLst>
+                <a:ext uri="{FF2B5EF4-FFF2-40B4-BE49-F238E27FC236}">
+                  <a16:creationId xmlns:a16="http://schemas.microsoft.com/office/drawing/2014/main" id="{0F165A2A-B03D-7540-2576-5EA4CB4381B9}"/>
+                </a:ext>
+              </a:extLst>
+            </p:cNvPr>
+            <p:cNvCxnSpPr>
+              <a:cxnSpLocks/>
+            </p:cNvCxnSpPr>
+            <p:nvPr/>
+          </p:nvCxnSpPr>
+          <p:spPr>
+            <a:xfrm>
+              <a:off x="2776226" y="5079706"/>
+              <a:ext cx="0" cy="1384989"/>
+            </a:xfrm>
+            <a:prstGeom prst="line">
+              <a:avLst/>
+            </a:prstGeom>
+            <a:ln w="12700">
+              <a:solidFill>
+                <a:schemeClr val="tx1"/>
+              </a:solidFill>
+            </a:ln>
+          </p:spPr>
+          <p:style>
+            <a:lnRef idx="2">
+              <a:schemeClr val="accent1"/>
+            </a:lnRef>
+            <a:fillRef idx="0">
+              <a:schemeClr val="accent1"/>
+            </a:fillRef>
+            <a:effectRef idx="1">
+              <a:schemeClr val="accent1"/>
+            </a:effectRef>
+            <a:fontRef idx="minor">
+              <a:schemeClr val="tx1"/>
+            </a:fontRef>
+          </p:style>
+        </p:cxnSp>
+        <p:cxnSp>
+          <p:nvCxnSpPr>
+            <p:cNvPr id="67" name="Straight Connector 66">
+              <a:extLst>
+                <a:ext uri="{FF2B5EF4-FFF2-40B4-BE49-F238E27FC236}">
+                  <a16:creationId xmlns:a16="http://schemas.microsoft.com/office/drawing/2014/main" id="{1CD8B4B1-E754-D673-75C3-334DA6DA3E05}"/>
+                </a:ext>
+              </a:extLst>
+            </p:cNvPr>
+            <p:cNvCxnSpPr>
+              <a:cxnSpLocks/>
+            </p:cNvCxnSpPr>
+            <p:nvPr/>
+          </p:nvCxnSpPr>
+          <p:spPr>
+            <a:xfrm>
+              <a:off x="2863856" y="5080367"/>
+              <a:ext cx="0" cy="1384989"/>
+            </a:xfrm>
+            <a:prstGeom prst="line">
+              <a:avLst/>
+            </a:prstGeom>
+            <a:ln w="12700">
+              <a:solidFill>
+                <a:schemeClr val="tx1"/>
+              </a:solidFill>
+            </a:ln>
+          </p:spPr>
+          <p:style>
+            <a:lnRef idx="2">
+              <a:schemeClr val="accent1"/>
+            </a:lnRef>
+            <a:fillRef idx="0">
+              <a:schemeClr val="accent1"/>
+            </a:fillRef>
+            <a:effectRef idx="1">
+              <a:schemeClr val="accent1"/>
+            </a:effectRef>
+            <a:fontRef idx="minor">
+              <a:schemeClr val="tx1"/>
+            </a:fontRef>
+          </p:style>
+        </p:cxnSp>
+        <p:cxnSp>
+          <p:nvCxnSpPr>
+            <p:cNvPr id="68" name="Straight Connector 67">
+              <a:extLst>
+                <a:ext uri="{FF2B5EF4-FFF2-40B4-BE49-F238E27FC236}">
+                  <a16:creationId xmlns:a16="http://schemas.microsoft.com/office/drawing/2014/main" id="{F1AD5370-F7AC-8368-6DD5-B710E39E103C}"/>
+                </a:ext>
+              </a:extLst>
+            </p:cNvPr>
+            <p:cNvCxnSpPr>
+              <a:cxnSpLocks/>
+            </p:cNvCxnSpPr>
+            <p:nvPr/>
+          </p:nvCxnSpPr>
+          <p:spPr>
+            <a:xfrm>
+              <a:off x="2955296" y="5079726"/>
+              <a:ext cx="0" cy="1384989"/>
+            </a:xfrm>
+            <a:prstGeom prst="line">
+              <a:avLst/>
+            </a:prstGeom>
+            <a:ln w="12700">
+              <a:solidFill>
+                <a:schemeClr val="tx1"/>
+              </a:solidFill>
+            </a:ln>
+          </p:spPr>
+          <p:style>
+            <a:lnRef idx="2">
+              <a:schemeClr val="accent1"/>
+            </a:lnRef>
+            <a:fillRef idx="0">
+              <a:schemeClr val="accent1"/>
+            </a:fillRef>
+            <a:effectRef idx="1">
+              <a:schemeClr val="accent1"/>
+            </a:effectRef>
+            <a:fontRef idx="minor">
+              <a:schemeClr val="tx1"/>
+            </a:fontRef>
+          </p:style>
+        </p:cxnSp>
+        <p:cxnSp>
+          <p:nvCxnSpPr>
+            <p:cNvPr id="69" name="Straight Connector 68">
+              <a:extLst>
+                <a:ext uri="{FF2B5EF4-FFF2-40B4-BE49-F238E27FC236}">
+                  <a16:creationId xmlns:a16="http://schemas.microsoft.com/office/drawing/2014/main" id="{8D73C86C-DB9D-0958-C292-B3583FDA82A5}"/>
+                </a:ext>
+              </a:extLst>
+            </p:cNvPr>
+            <p:cNvCxnSpPr>
+              <a:cxnSpLocks/>
+            </p:cNvCxnSpPr>
+            <p:nvPr/>
+          </p:nvCxnSpPr>
+          <p:spPr>
+            <a:xfrm>
+              <a:off x="3065786" y="5072747"/>
+              <a:ext cx="0" cy="1384989"/>
+            </a:xfrm>
+            <a:prstGeom prst="line">
+              <a:avLst/>
+            </a:prstGeom>
+            <a:ln w="12700">
+              <a:solidFill>
+                <a:schemeClr val="tx1"/>
+              </a:solidFill>
+            </a:ln>
+          </p:spPr>
+          <p:style>
+            <a:lnRef idx="2">
+              <a:schemeClr val="accent1"/>
+            </a:lnRef>
+            <a:fillRef idx="0">
+              <a:schemeClr val="accent1"/>
+            </a:fillRef>
+            <a:effectRef idx="1">
+              <a:schemeClr val="accent1"/>
+            </a:effectRef>
+            <a:fontRef idx="minor">
+              <a:schemeClr val="tx1"/>
+            </a:fontRef>
+          </p:style>
+        </p:cxnSp>
+        <p:cxnSp>
+          <p:nvCxnSpPr>
+            <p:cNvPr id="70" name="Straight Connector 69">
+              <a:extLst>
+                <a:ext uri="{FF2B5EF4-FFF2-40B4-BE49-F238E27FC236}">
+                  <a16:creationId xmlns:a16="http://schemas.microsoft.com/office/drawing/2014/main" id="{A883E0D0-53F5-2402-E25B-1F1601787EB5}"/>
+                </a:ext>
+              </a:extLst>
+            </p:cNvPr>
+            <p:cNvCxnSpPr>
+              <a:cxnSpLocks/>
+            </p:cNvCxnSpPr>
+            <p:nvPr/>
+          </p:nvCxnSpPr>
+          <p:spPr>
+            <a:xfrm>
+              <a:off x="3168656" y="5072747"/>
+              <a:ext cx="0" cy="1384989"/>
+            </a:xfrm>
+            <a:prstGeom prst="line">
+              <a:avLst/>
+            </a:prstGeom>
+            <a:ln w="12700">
+              <a:solidFill>
+                <a:schemeClr val="tx1"/>
+              </a:solidFill>
+            </a:ln>
+          </p:spPr>
+          <p:style>
+            <a:lnRef idx="2">
+              <a:schemeClr val="accent1"/>
+            </a:lnRef>
+            <a:fillRef idx="0">
+              <a:schemeClr val="accent1"/>
+            </a:fillRef>
+            <a:effectRef idx="1">
+              <a:schemeClr val="accent1"/>
+            </a:effectRef>
+            <a:fontRef idx="minor">
+              <a:schemeClr val="tx1"/>
+            </a:fontRef>
+          </p:style>
+        </p:cxnSp>
+      </p:grpSp>
+      <p:sp>
+        <p:nvSpPr>
+          <p:cNvPr id="72" name="TextBox 71">
+            <a:extLst>
+              <a:ext uri="{FF2B5EF4-FFF2-40B4-BE49-F238E27FC236}">
+                <a16:creationId xmlns:a16="http://schemas.microsoft.com/office/drawing/2014/main" id="{A5E61363-528B-11DD-F92C-AF66CC659506}"/>
+              </a:ext>
+            </a:extLst>
+          </p:cNvPr>
+          <p:cNvSpPr txBox="1"/>
+          <p:nvPr/>
+        </p:nvSpPr>
+        <p:spPr>
+          <a:xfrm>
+            <a:off x="1877356" y="6166371"/>
+            <a:ext cx="1618857" cy="584775"/>
+          </a:xfrm>
+          <a:prstGeom prst="rect">
+            <a:avLst/>
+          </a:prstGeom>
+          <a:noFill/>
+          <a:ln>
+            <a:solidFill>
+              <a:schemeClr val="tx1"/>
+            </a:solidFill>
+          </a:ln>
+        </p:spPr>
+        <p:txBody>
+          <a:bodyPr wrap="square" rtlCol="0">
+            <a:spAutoFit/>
+          </a:bodyPr>
+          <a:lstStyle/>
+          <a:p>
+            <a:r>
+              <a:rPr lang="vi-VN" sz="800" b="1"/>
+              <a:t>Ảnh 224×224 → Chia thành lưới 14×14 patches</a:t>
+            </a:r>
+          </a:p>
+          <a:p>
+            <a:r>
+              <a:rPr lang="vi-VN" sz="800" b="1"/>
+              <a:t>Mỗi patch = 16×16 pixels</a:t>
+            </a:r>
+          </a:p>
+          <a:p>
+            <a:r>
+              <a:rPr lang="vi-VN" sz="800" b="1"/>
+              <a:t>Tổng: 14 × 14 = 196 patches</a:t>
+            </a:r>
+            <a:endParaRPr lang="en-US" sz="800"/>
+          </a:p>
+        </p:txBody>
+      </p:sp>
+      <p:pic>
+        <p:nvPicPr>
+          <p:cNvPr id="74" name="Picture 73" descr="A diagram of a multi-head attention&#10;&#10;AI-generated content may be incorrect.">
+            <a:extLst>
+              <a:ext uri="{FF2B5EF4-FFF2-40B4-BE49-F238E27FC236}">
+                <a16:creationId xmlns:a16="http://schemas.microsoft.com/office/drawing/2014/main" id="{77D84386-CDBA-B8F5-284B-392AF92EFC89}"/>
+              </a:ext>
+            </a:extLst>
+          </p:cNvPr>
+          <p:cNvPicPr>
+            <a:picLocks noChangeAspect="1"/>
+          </p:cNvPicPr>
+          <p:nvPr/>
+        </p:nvPicPr>
+        <p:blipFill>
+          <a:blip r:embed="rId3"/>
+          <a:stretch>
+            <a:fillRect/>
+          </a:stretch>
+        </p:blipFill>
+        <p:spPr>
+          <a:xfrm>
+            <a:off x="5333734" y="5071676"/>
+            <a:ext cx="1040848" cy="1679470"/>
+          </a:xfrm>
+          <a:prstGeom prst="rect">
+            <a:avLst/>
+          </a:prstGeom>
+        </p:spPr>
+      </p:pic>
+      <p:sp>
+        <p:nvSpPr>
+          <p:cNvPr id="75" name="TextBox 74">
+            <a:extLst>
+              <a:ext uri="{FF2B5EF4-FFF2-40B4-BE49-F238E27FC236}">
+                <a16:creationId xmlns:a16="http://schemas.microsoft.com/office/drawing/2014/main" id="{AC2A70CB-470F-0529-9F52-6D40F14E11A2}"/>
+              </a:ext>
+            </a:extLst>
+          </p:cNvPr>
+          <p:cNvSpPr txBox="1"/>
+          <p:nvPr/>
+        </p:nvSpPr>
+        <p:spPr>
+          <a:xfrm>
+            <a:off x="6987280" y="5631694"/>
+            <a:ext cx="2449645" cy="646331"/>
+          </a:xfrm>
+          <a:prstGeom prst="rect">
+            <a:avLst/>
+          </a:prstGeom>
+          <a:noFill/>
         </p:spPr>
         <p:txBody>
           <a:bodyPr wrap="none" rtlCol="0">
@@ -7470,8 +10798,15 @@
           <a:lstStyle/>
           <a:p>
             <a:r>
-              <a:rPr lang="en-US" sz="3600" b="1"/>
-              <a:t>Reference</a:t>
+              <a:rPr lang="en-US"/>
+              <a:t>imageNet21K</a:t>
+            </a:r>
+            <a:br>
+              <a:rPr lang="en-US"/>
+            </a:br>
+            <a:r>
+              <a:rPr lang="en-US"/>
+              <a:t>finetuning imageNet1K</a:t>
             </a:r>
           </a:p>
         </p:txBody>
@@ -7479,7 +10814,7 @@
     </p:spTree>
     <p:extLst>
       <p:ext uri="{BB962C8B-B14F-4D97-AF65-F5344CB8AC3E}">
-        <p14:creationId xmlns:p14="http://schemas.microsoft.com/office/powerpoint/2010/main" val="98599837"/>
+        <p14:creationId xmlns:p14="http://schemas.microsoft.com/office/powerpoint/2010/main" val="2618245055"/>
       </p:ext>
     </p:extLst>
   </p:cSld>
